--- a/Pregrado/Trabajo de grado 3/Clases/Sesion 13 - Entregables para repositorio institucional/Presentacion.pptx
+++ b/Pregrado/Trabajo de grado 3/Clases/Sesion 13 - Entregables para repositorio institucional/Presentacion.pptx
@@ -12533,7 +12533,7 @@
                           </a:solidFill>
                           <a:latin typeface="Calibri"/>
                         </a:rPr>
-                        <a:t>"Trabajo de grado — proyecto final 2026"</a:t>
+                        <a:t>"Trabajo de grado — proyecto final"</a:t>
                       </a:r>
                     </a:p>
                   </a:txBody>

--- a/Pregrado/Trabajo de grado 3/Clases/Sesion 13 - Entregables para repositorio institucional/Presentacion.pptx
+++ b/Pregrado/Trabajo de grado 3/Clases/Sesion 13 - Entregables para repositorio institucional/Presentacion.pptx
@@ -3368,41 +3368,6 @@
           </a:p>
         </p:txBody>
       </p:sp>
-      <p:sp>
-        <p:nvSpPr>
-          <p:cNvPr id="7" name="TextBox 6"/>
-          <p:cNvSpPr txBox="1"/>
-          <p:nvPr/>
-        </p:nvSpPr>
-        <p:spPr>
-          <a:xfrm>
-            <a:off x="2194560" y="6446520"/>
-            <a:ext cx="5943600" cy="274320"/>
-          </a:xfrm>
-          <a:prstGeom prst="rect">
-            <a:avLst/>
-          </a:prstGeom>
-          <a:noFill/>
-        </p:spPr>
-        <p:txBody>
-          <a:bodyPr wrap="square" anchor="t" lIns="0" rIns="0" tIns="0" bIns="0">
-            <a:spAutoFit/>
-          </a:bodyPr>
-          <a:lstStyle/>
-          <a:p>
-            <a:pPr algn="l"/>
-            <a:r>
-              <a:rPr sz="1000" b="1" i="0">
-                <a:solidFill>
-                  <a:srgbClr val="8F989D"/>
-                </a:solidFill>
-                <a:latin typeface="Calibri"/>
-              </a:rPr>
-              <a:t>Inicio 5:10 pm</a:t>
-            </a:r>
-          </a:p>
-        </p:txBody>
-      </p:sp>
     </p:spTree>
   </p:cSld>
   <p:clrMapOvr>
@@ -3899,41 +3864,6 @@
         </p:nvSpPr>
         <p:spPr>
           <a:xfrm>
-            <a:off x="2194560" y="6446520"/>
-            <a:ext cx="5943600" cy="274320"/>
-          </a:xfrm>
-          <a:prstGeom prst="rect">
-            <a:avLst/>
-          </a:prstGeom>
-          <a:noFill/>
-        </p:spPr>
-        <p:txBody>
-          <a:bodyPr wrap="square" anchor="t" lIns="0" rIns="0" tIns="0" bIns="0">
-            <a:spAutoFit/>
-          </a:bodyPr>
-          <a:lstStyle/>
-          <a:p>
-            <a:pPr algn="l"/>
-            <a:r>
-              <a:rPr sz="1000" b="1" i="0">
-                <a:solidFill>
-                  <a:srgbClr val="8F989D"/>
-                </a:solidFill>
-                <a:latin typeface="Calibri"/>
-              </a:rPr>
-              <a:t>Inicio 5:10 pm</a:t>
-            </a:r>
-          </a:p>
-        </p:txBody>
-      </p:sp>
-      <p:sp>
-        <p:nvSpPr>
-          <p:cNvPr id="6" name="TextBox 5"/>
-          <p:cNvSpPr txBox="1"/>
-          <p:nvPr/>
-        </p:nvSpPr>
-        <p:spPr>
-          <a:xfrm>
             <a:off x="11094415" y="6446520"/>
             <a:ext cx="548640" cy="274320"/>
           </a:xfrm>
@@ -4201,41 +4131,6 @@
         </p:nvSpPr>
         <p:spPr>
           <a:xfrm>
-            <a:off x="2194560" y="6446520"/>
-            <a:ext cx="5943600" cy="274320"/>
-          </a:xfrm>
-          <a:prstGeom prst="rect">
-            <a:avLst/>
-          </a:prstGeom>
-          <a:noFill/>
-        </p:spPr>
-        <p:txBody>
-          <a:bodyPr wrap="square" anchor="t" lIns="0" rIns="0" tIns="0" bIns="0">
-            <a:spAutoFit/>
-          </a:bodyPr>
-          <a:lstStyle/>
-          <a:p>
-            <a:pPr algn="l"/>
-            <a:r>
-              <a:rPr sz="1000" b="1" i="0">
-                <a:solidFill>
-                  <a:srgbClr val="8F989D"/>
-                </a:solidFill>
-                <a:latin typeface="Calibri"/>
-              </a:rPr>
-              <a:t>Inicio 5:10 pm</a:t>
-            </a:r>
-          </a:p>
-        </p:txBody>
-      </p:sp>
-      <p:sp>
-        <p:nvSpPr>
-          <p:cNvPr id="6" name="TextBox 5"/>
-          <p:cNvSpPr txBox="1"/>
-          <p:nvPr/>
-        </p:nvSpPr>
-        <p:spPr>
-          <a:xfrm>
             <a:off x="11094415" y="6446520"/>
             <a:ext cx="548640" cy="274320"/>
           </a:xfrm>
@@ -4265,7 +4160,7 @@
       </p:sp>
       <p:sp>
         <p:nvSpPr>
-          <p:cNvPr id="7" name="TextBox 6"/>
+          <p:cNvPr id="6" name="TextBox 5"/>
           <p:cNvSpPr txBox="1"/>
           <p:nvPr/>
         </p:nvSpPr>
@@ -4840,41 +4735,6 @@
         </p:nvSpPr>
         <p:spPr>
           <a:xfrm>
-            <a:off x="2194560" y="6446520"/>
-            <a:ext cx="5943600" cy="274320"/>
-          </a:xfrm>
-          <a:prstGeom prst="rect">
-            <a:avLst/>
-          </a:prstGeom>
-          <a:noFill/>
-        </p:spPr>
-        <p:txBody>
-          <a:bodyPr wrap="square" anchor="t" lIns="0" rIns="0" tIns="0" bIns="0">
-            <a:spAutoFit/>
-          </a:bodyPr>
-          <a:lstStyle/>
-          <a:p>
-            <a:pPr algn="l"/>
-            <a:r>
-              <a:rPr sz="1000" b="1" i="0">
-                <a:solidFill>
-                  <a:srgbClr val="8F989D"/>
-                </a:solidFill>
-                <a:latin typeface="Calibri"/>
-              </a:rPr>
-              <a:t>Inicio 5:10 pm</a:t>
-            </a:r>
-          </a:p>
-        </p:txBody>
-      </p:sp>
-      <p:sp>
-        <p:nvSpPr>
-          <p:cNvPr id="13" name="TextBox 12"/>
-          <p:cNvSpPr txBox="1"/>
-          <p:nvPr/>
-        </p:nvSpPr>
-        <p:spPr>
-          <a:xfrm>
             <a:off x="11094415" y="6446520"/>
             <a:ext cx="548640" cy="274320"/>
           </a:xfrm>
@@ -5418,41 +5278,6 @@
         </p:nvSpPr>
         <p:spPr>
           <a:xfrm>
-            <a:off x="2194560" y="6446520"/>
-            <a:ext cx="5943600" cy="274320"/>
-          </a:xfrm>
-          <a:prstGeom prst="rect">
-            <a:avLst/>
-          </a:prstGeom>
-          <a:noFill/>
-        </p:spPr>
-        <p:txBody>
-          <a:bodyPr wrap="square" anchor="t" lIns="0" rIns="0" tIns="0" bIns="0">
-            <a:spAutoFit/>
-          </a:bodyPr>
-          <a:lstStyle/>
-          <a:p>
-            <a:pPr algn="l"/>
-            <a:r>
-              <a:rPr sz="1000" b="1" i="0">
-                <a:solidFill>
-                  <a:srgbClr val="8F989D"/>
-                </a:solidFill>
-                <a:latin typeface="Calibri"/>
-              </a:rPr>
-              <a:t>Inicio 5:10 pm</a:t>
-            </a:r>
-          </a:p>
-        </p:txBody>
-      </p:sp>
-      <p:sp>
-        <p:nvSpPr>
-          <p:cNvPr id="13" name="TextBox 12"/>
-          <p:cNvSpPr txBox="1"/>
-          <p:nvPr/>
-        </p:nvSpPr>
-        <p:spPr>
-          <a:xfrm>
             <a:off x="11094415" y="6446520"/>
             <a:ext cx="548640" cy="274320"/>
           </a:xfrm>
@@ -5705,41 +5530,6 @@
         </p:nvSpPr>
         <p:spPr>
           <a:xfrm>
-            <a:off x="2194560" y="6446520"/>
-            <a:ext cx="5943600" cy="274320"/>
-          </a:xfrm>
-          <a:prstGeom prst="rect">
-            <a:avLst/>
-          </a:prstGeom>
-          <a:noFill/>
-        </p:spPr>
-        <p:txBody>
-          <a:bodyPr wrap="square" anchor="t" lIns="0" rIns="0" tIns="0" bIns="0">
-            <a:spAutoFit/>
-          </a:bodyPr>
-          <a:lstStyle/>
-          <a:p>
-            <a:pPr algn="l"/>
-            <a:r>
-              <a:rPr sz="1000" b="1" i="0">
-                <a:solidFill>
-                  <a:srgbClr val="8F989D"/>
-                </a:solidFill>
-                <a:latin typeface="Calibri"/>
-              </a:rPr>
-              <a:t>Inicio 5:10 pm</a:t>
-            </a:r>
-          </a:p>
-        </p:txBody>
-      </p:sp>
-      <p:sp>
-        <p:nvSpPr>
-          <p:cNvPr id="7" name="TextBox 6"/>
-          <p:cNvSpPr txBox="1"/>
-          <p:nvPr/>
-        </p:nvSpPr>
-        <p:spPr>
-          <a:xfrm>
             <a:off x="11094415" y="6446520"/>
             <a:ext cx="548640" cy="274320"/>
           </a:xfrm>
@@ -5976,7 +5766,7 @@
                 </a:solidFill>
                 <a:latin typeface="Calibri"/>
               </a:rPr>
-              <a:t> Meta ahí, y solo ahí, las piezas definitivas: artículo PDF, anexos, póster, autorización y constancia de antiplagio.</a:t>
+              <a:t> Meta ahí, y solo ahí, las piezas definitivas: artículo PDF, anexos, póster, autorización y, si el curso lo exige, el informe de similitud.</a:t>
             </a:r>
           </a:p>
           <a:p>
@@ -6330,41 +6120,6 @@
       <p:sp>
         <p:nvSpPr>
           <p:cNvPr id="5" name="TextBox 4"/>
-          <p:cNvSpPr txBox="1"/>
-          <p:nvPr/>
-        </p:nvSpPr>
-        <p:spPr>
-          <a:xfrm>
-            <a:off x="2194560" y="6446520"/>
-            <a:ext cx="5943600" cy="274320"/>
-          </a:xfrm>
-          <a:prstGeom prst="rect">
-            <a:avLst/>
-          </a:prstGeom>
-          <a:noFill/>
-        </p:spPr>
-        <p:txBody>
-          <a:bodyPr wrap="square" anchor="t" lIns="0" rIns="0" tIns="0" bIns="0">
-            <a:spAutoFit/>
-          </a:bodyPr>
-          <a:lstStyle/>
-          <a:p>
-            <a:pPr algn="l"/>
-            <a:r>
-              <a:rPr sz="1000" b="1" i="0">
-                <a:solidFill>
-                  <a:srgbClr val="8F989D"/>
-                </a:solidFill>
-                <a:latin typeface="Calibri"/>
-              </a:rPr>
-              <a:t>Inicio 5:10 pm</a:t>
-            </a:r>
-          </a:p>
-        </p:txBody>
-      </p:sp>
-      <p:sp>
-        <p:nvSpPr>
-          <p:cNvPr id="6" name="TextBox 5"/>
           <p:cNvSpPr txBox="1"/>
           <p:nvPr/>
         </p:nvSpPr>
@@ -6809,41 +6564,6 @@
         </p:nvSpPr>
         <p:spPr>
           <a:xfrm>
-            <a:off x="2194560" y="6446520"/>
-            <a:ext cx="5943600" cy="274320"/>
-          </a:xfrm>
-          <a:prstGeom prst="rect">
-            <a:avLst/>
-          </a:prstGeom>
-          <a:noFill/>
-        </p:spPr>
-        <p:txBody>
-          <a:bodyPr wrap="square" anchor="t" lIns="0" rIns="0" tIns="0" bIns="0">
-            <a:spAutoFit/>
-          </a:bodyPr>
-          <a:lstStyle/>
-          <a:p>
-            <a:pPr algn="l"/>
-            <a:r>
-              <a:rPr sz="1000" b="1" i="0">
-                <a:solidFill>
-                  <a:srgbClr val="8F989D"/>
-                </a:solidFill>
-                <a:latin typeface="Calibri"/>
-              </a:rPr>
-              <a:t>Inicio 5:10 pm</a:t>
-            </a:r>
-          </a:p>
-        </p:txBody>
-      </p:sp>
-      <p:sp>
-        <p:nvSpPr>
-          <p:cNvPr id="6" name="TextBox 5"/>
-          <p:cNvSpPr txBox="1"/>
-          <p:nvPr/>
-        </p:nvSpPr>
-        <p:spPr>
-          <a:xfrm>
             <a:off x="11094415" y="6446520"/>
             <a:ext cx="548640" cy="274320"/>
           </a:xfrm>
@@ -7168,41 +6888,6 @@
         </p:nvSpPr>
         <p:spPr>
           <a:xfrm>
-            <a:off x="2194560" y="6446520"/>
-            <a:ext cx="5943600" cy="274320"/>
-          </a:xfrm>
-          <a:prstGeom prst="rect">
-            <a:avLst/>
-          </a:prstGeom>
-          <a:noFill/>
-        </p:spPr>
-        <p:txBody>
-          <a:bodyPr wrap="square" anchor="t" lIns="0" rIns="0" tIns="0" bIns="0">
-            <a:spAutoFit/>
-          </a:bodyPr>
-          <a:lstStyle/>
-          <a:p>
-            <a:pPr algn="l"/>
-            <a:r>
-              <a:rPr sz="1000" b="1" i="0">
-                <a:solidFill>
-                  <a:srgbClr val="8F989D"/>
-                </a:solidFill>
-                <a:latin typeface="Calibri"/>
-              </a:rPr>
-              <a:t>Inicio 5:10 pm</a:t>
-            </a:r>
-          </a:p>
-        </p:txBody>
-      </p:sp>
-      <p:sp>
-        <p:nvSpPr>
-          <p:cNvPr id="6" name="TextBox 5"/>
-          <p:cNvSpPr txBox="1"/>
-          <p:nvPr/>
-        </p:nvSpPr>
-        <p:spPr>
-          <a:xfrm>
             <a:off x="11094415" y="6446520"/>
             <a:ext cx="548640" cy="274320"/>
           </a:xfrm>
@@ -7232,7 +6917,7 @@
       </p:sp>
       <p:sp>
         <p:nvSpPr>
-          <p:cNvPr id="7" name="TextBox 6"/>
+          <p:cNvPr id="6" name="TextBox 5"/>
           <p:cNvSpPr txBox="1"/>
           <p:nvPr/>
         </p:nvSpPr>
@@ -8061,41 +7746,6 @@
         </p:nvSpPr>
         <p:spPr>
           <a:xfrm>
-            <a:off x="2194560" y="6446520"/>
-            <a:ext cx="5943600" cy="274320"/>
-          </a:xfrm>
-          <a:prstGeom prst="rect">
-            <a:avLst/>
-          </a:prstGeom>
-          <a:noFill/>
-        </p:spPr>
-        <p:txBody>
-          <a:bodyPr wrap="square" anchor="t" lIns="0" rIns="0" tIns="0" bIns="0">
-            <a:spAutoFit/>
-          </a:bodyPr>
-          <a:lstStyle/>
-          <a:p>
-            <a:pPr algn="l"/>
-            <a:r>
-              <a:rPr sz="1000" b="1" i="0">
-                <a:solidFill>
-                  <a:srgbClr val="8F989D"/>
-                </a:solidFill>
-                <a:latin typeface="Calibri"/>
-              </a:rPr>
-              <a:t>Inicio 5:10 pm</a:t>
-            </a:r>
-          </a:p>
-        </p:txBody>
-      </p:sp>
-      <p:sp>
-        <p:nvSpPr>
-          <p:cNvPr id="6" name="TextBox 5"/>
-          <p:cNvSpPr txBox="1"/>
-          <p:nvPr/>
-        </p:nvSpPr>
-        <p:spPr>
-          <a:xfrm>
             <a:off x="11094415" y="6446520"/>
             <a:ext cx="548640" cy="274320"/>
           </a:xfrm>
@@ -8336,7 +7986,7 @@
                           </a:solidFill>
                           <a:latin typeface="Calibri"/>
                         </a:rPr>
-                        <a:t>Constancia de antiplagio adjunta</a:t>
+                        <a:t>Resolví si el curso exige informe de similitud</a:t>
                       </a:r>
                     </a:p>
                   </a:txBody>
@@ -8359,7 +8009,7 @@
                           </a:solidFill>
                           <a:latin typeface="Calibri"/>
                         </a:rPr>
-                        <a:t>Generada por la ruta institucional</a:t>
+                        <a:t>Lo confirmé con el Docente; si aplica, está adjunto</a:t>
                       </a:r>
                     </a:p>
                   </a:txBody>
@@ -8476,41 +8126,6 @@
         </p:nvSpPr>
         <p:spPr>
           <a:xfrm>
-            <a:off x="2194560" y="6446520"/>
-            <a:ext cx="5943600" cy="274320"/>
-          </a:xfrm>
-          <a:prstGeom prst="rect">
-            <a:avLst/>
-          </a:prstGeom>
-          <a:noFill/>
-        </p:spPr>
-        <p:txBody>
-          <a:bodyPr wrap="square" anchor="t" lIns="0" rIns="0" tIns="0" bIns="0">
-            <a:spAutoFit/>
-          </a:bodyPr>
-          <a:lstStyle/>
-          <a:p>
-            <a:pPr algn="l"/>
-            <a:r>
-              <a:rPr sz="1000" b="1" i="0">
-                <a:solidFill>
-                  <a:srgbClr val="8F989D"/>
-                </a:solidFill>
-                <a:latin typeface="Calibri"/>
-              </a:rPr>
-              <a:t>Inicio 5:10 pm</a:t>
-            </a:r>
-          </a:p>
-        </p:txBody>
-      </p:sp>
-      <p:sp>
-        <p:nvSpPr>
-          <p:cNvPr id="6" name="TextBox 5"/>
-          <p:cNvSpPr txBox="1"/>
-          <p:nvPr/>
-        </p:nvSpPr>
-        <p:spPr>
-          <a:xfrm>
             <a:off x="11094415" y="6446520"/>
             <a:ext cx="548640" cy="274320"/>
           </a:xfrm>
@@ -8980,41 +8595,6 @@
         </p:nvSpPr>
         <p:spPr>
           <a:xfrm>
-            <a:off x="2194560" y="6446520"/>
-            <a:ext cx="5943600" cy="274320"/>
-          </a:xfrm>
-          <a:prstGeom prst="rect">
-            <a:avLst/>
-          </a:prstGeom>
-          <a:noFill/>
-        </p:spPr>
-        <p:txBody>
-          <a:bodyPr wrap="square" anchor="t" lIns="0" rIns="0" tIns="0" bIns="0">
-            <a:spAutoFit/>
-          </a:bodyPr>
-          <a:lstStyle/>
-          <a:p>
-            <a:pPr algn="l"/>
-            <a:r>
-              <a:rPr sz="1000" b="1" i="0">
-                <a:solidFill>
-                  <a:srgbClr val="8F989D"/>
-                </a:solidFill>
-                <a:latin typeface="Calibri"/>
-              </a:rPr>
-              <a:t>Inicio 5:10 pm</a:t>
-            </a:r>
-          </a:p>
-        </p:txBody>
-      </p:sp>
-      <p:sp>
-        <p:nvSpPr>
-          <p:cNvPr id="6" name="TextBox 5"/>
-          <p:cNvSpPr txBox="1"/>
-          <p:nvPr/>
-        </p:nvSpPr>
-        <p:spPr>
-          <a:xfrm>
             <a:off x="11094415" y="6446520"/>
             <a:ext cx="548640" cy="274320"/>
           </a:xfrm>
@@ -9044,7 +8624,7 @@
       </p:sp>
       <p:sp>
         <p:nvSpPr>
-          <p:cNvPr id="7" name="TextBox 6"/>
+          <p:cNvPr id="6" name="TextBox 5"/>
           <p:cNvSpPr txBox="1"/>
           <p:nvPr/>
         </p:nvSpPr>
@@ -9486,41 +9066,6 @@
         </p:nvSpPr>
         <p:spPr>
           <a:xfrm>
-            <a:off x="2194560" y="6446520"/>
-            <a:ext cx="5943600" cy="274320"/>
-          </a:xfrm>
-          <a:prstGeom prst="rect">
-            <a:avLst/>
-          </a:prstGeom>
-          <a:noFill/>
-        </p:spPr>
-        <p:txBody>
-          <a:bodyPr wrap="square" anchor="t" lIns="0" rIns="0" tIns="0" bIns="0">
-            <a:spAutoFit/>
-          </a:bodyPr>
-          <a:lstStyle/>
-          <a:p>
-            <a:pPr algn="l"/>
-            <a:r>
-              <a:rPr sz="1000" b="1" i="0">
-                <a:solidFill>
-                  <a:srgbClr val="8F989D"/>
-                </a:solidFill>
-                <a:latin typeface="Calibri"/>
-              </a:rPr>
-              <a:t>Inicio 5:10 pm</a:t>
-            </a:r>
-          </a:p>
-        </p:txBody>
-      </p:sp>
-      <p:sp>
-        <p:nvSpPr>
-          <p:cNvPr id="6" name="TextBox 5"/>
-          <p:cNvSpPr txBox="1"/>
-          <p:nvPr/>
-        </p:nvSpPr>
-        <p:spPr>
-          <a:xfrm>
             <a:off x="11094415" y="6446520"/>
             <a:ext cx="548640" cy="274320"/>
           </a:xfrm>
@@ -9767,41 +9312,6 @@
           </a:p>
         </p:txBody>
       </p:sp>
-      <p:sp>
-        <p:nvSpPr>
-          <p:cNvPr id="7" name="TextBox 6"/>
-          <p:cNvSpPr txBox="1"/>
-          <p:nvPr/>
-        </p:nvSpPr>
-        <p:spPr>
-          <a:xfrm>
-            <a:off x="2194560" y="6446520"/>
-            <a:ext cx="5943600" cy="274320"/>
-          </a:xfrm>
-          <a:prstGeom prst="rect">
-            <a:avLst/>
-          </a:prstGeom>
-          <a:noFill/>
-        </p:spPr>
-        <p:txBody>
-          <a:bodyPr wrap="square" anchor="t" lIns="0" rIns="0" tIns="0" bIns="0">
-            <a:spAutoFit/>
-          </a:bodyPr>
-          <a:lstStyle/>
-          <a:p>
-            <a:pPr algn="l"/>
-            <a:r>
-              <a:rPr sz="1000" b="1" i="0">
-                <a:solidFill>
-                  <a:srgbClr val="8F989D"/>
-                </a:solidFill>
-                <a:latin typeface="Calibri"/>
-              </a:rPr>
-              <a:t>Inicio 5:10 pm</a:t>
-            </a:r>
-          </a:p>
-        </p:txBody>
-      </p:sp>
     </p:spTree>
   </p:cSld>
   <p:clrMapOvr>
@@ -10239,41 +9749,6 @@
       <p:sp>
         <p:nvSpPr>
           <p:cNvPr id="5" name="TextBox 4"/>
-          <p:cNvSpPr txBox="1"/>
-          <p:nvPr/>
-        </p:nvSpPr>
-        <p:spPr>
-          <a:xfrm>
-            <a:off x="2194560" y="6446520"/>
-            <a:ext cx="5943600" cy="274320"/>
-          </a:xfrm>
-          <a:prstGeom prst="rect">
-            <a:avLst/>
-          </a:prstGeom>
-          <a:noFill/>
-        </p:spPr>
-        <p:txBody>
-          <a:bodyPr wrap="square" anchor="t" lIns="0" rIns="0" tIns="0" bIns="0">
-            <a:spAutoFit/>
-          </a:bodyPr>
-          <a:lstStyle/>
-          <a:p>
-            <a:pPr algn="l"/>
-            <a:r>
-              <a:rPr sz="1000" b="1" i="0">
-                <a:solidFill>
-                  <a:srgbClr val="8F989D"/>
-                </a:solidFill>
-                <a:latin typeface="Calibri"/>
-              </a:rPr>
-              <a:t>Inicio 5:10 pm</a:t>
-            </a:r>
-          </a:p>
-        </p:txBody>
-      </p:sp>
-      <p:sp>
-        <p:nvSpPr>
-          <p:cNvPr id="6" name="TextBox 5"/>
           <p:cNvSpPr txBox="1"/>
           <p:nvPr/>
         </p:nvSpPr>
@@ -10803,7 +10278,7 @@
                           </a:solidFill>
                           <a:latin typeface="Calibri"/>
                         </a:rPr>
-                        <a:t>Constancia antiplagio</a:t>
+                        <a:t>Informe de similitud (si aplica)</a:t>
                       </a:r>
                     </a:p>
                   </a:txBody>
@@ -10826,7 +10301,7 @@
                           </a:solidFill>
                           <a:latin typeface="Calibri"/>
                         </a:rPr>
-                        <a:t>Generada por la ruta institucional en CDigital</a:t>
+                        <a:t>Solo si el curso lo exige; el Docente indica cómo obtenerlo</a:t>
                       </a:r>
                     </a:p>
                   </a:txBody>
@@ -10973,7 +10448,7 @@
                 </a:solidFill>
                 <a:latin typeface="Calibri"/>
               </a:rPr>
-              <a:t>una sola pieza</a:t>
+              <a:t>una sola de las piezas exigidas</a:t>
             </a:r>
             <a:r>
               <a:rPr sz="1200" b="0" i="1">
@@ -11008,41 +10483,6 @@
       <p:sp>
         <p:nvSpPr>
           <p:cNvPr id="6" name="TextBox 5"/>
-          <p:cNvSpPr txBox="1"/>
-          <p:nvPr/>
-        </p:nvSpPr>
-        <p:spPr>
-          <a:xfrm>
-            <a:off x="2194560" y="6446520"/>
-            <a:ext cx="5943600" cy="274320"/>
-          </a:xfrm>
-          <a:prstGeom prst="rect">
-            <a:avLst/>
-          </a:prstGeom>
-          <a:noFill/>
-        </p:spPr>
-        <p:txBody>
-          <a:bodyPr wrap="square" anchor="t" lIns="0" rIns="0" tIns="0" bIns="0">
-            <a:spAutoFit/>
-          </a:bodyPr>
-          <a:lstStyle/>
-          <a:p>
-            <a:pPr algn="l"/>
-            <a:r>
-              <a:rPr sz="1000" b="1" i="0">
-                <a:solidFill>
-                  <a:srgbClr val="8F989D"/>
-                </a:solidFill>
-                <a:latin typeface="Calibri"/>
-              </a:rPr>
-              <a:t>Inicio 5:10 pm</a:t>
-            </a:r>
-          </a:p>
-        </p:txBody>
-      </p:sp>
-      <p:sp>
-        <p:nvSpPr>
-          <p:cNvPr id="7" name="TextBox 6"/>
           <p:cNvSpPr txBox="1"/>
           <p:nvPr/>
         </p:nvSpPr>
@@ -11526,41 +10966,6 @@
         </p:nvSpPr>
         <p:spPr>
           <a:xfrm>
-            <a:off x="2194560" y="6446520"/>
-            <a:ext cx="5943600" cy="274320"/>
-          </a:xfrm>
-          <a:prstGeom prst="rect">
-            <a:avLst/>
-          </a:prstGeom>
-          <a:noFill/>
-        </p:spPr>
-        <p:txBody>
-          <a:bodyPr wrap="square" anchor="t" lIns="0" rIns="0" tIns="0" bIns="0">
-            <a:spAutoFit/>
-          </a:bodyPr>
-          <a:lstStyle/>
-          <a:p>
-            <a:pPr algn="l"/>
-            <a:r>
-              <a:rPr sz="1000" b="1" i="0">
-                <a:solidFill>
-                  <a:srgbClr val="8F989D"/>
-                </a:solidFill>
-                <a:latin typeface="Calibri"/>
-              </a:rPr>
-              <a:t>Inicio 5:10 pm</a:t>
-            </a:r>
-          </a:p>
-        </p:txBody>
-      </p:sp>
-      <p:sp>
-        <p:nvSpPr>
-          <p:cNvPr id="6" name="TextBox 5"/>
-          <p:cNvSpPr txBox="1"/>
-          <p:nvPr/>
-        </p:nvSpPr>
-        <p:spPr>
-          <a:xfrm>
             <a:off x="11094415" y="6446520"/>
             <a:ext cx="548640" cy="274320"/>
           </a:xfrm>
@@ -11758,41 +11163,6 @@
         </p:nvSpPr>
         <p:spPr>
           <a:xfrm>
-            <a:off x="2194560" y="6446520"/>
-            <a:ext cx="5943600" cy="274320"/>
-          </a:xfrm>
-          <a:prstGeom prst="rect">
-            <a:avLst/>
-          </a:prstGeom>
-          <a:noFill/>
-        </p:spPr>
-        <p:txBody>
-          <a:bodyPr wrap="square" anchor="t" lIns="0" rIns="0" tIns="0" bIns="0">
-            <a:spAutoFit/>
-          </a:bodyPr>
-          <a:lstStyle/>
-          <a:p>
-            <a:pPr algn="l"/>
-            <a:r>
-              <a:rPr sz="1000" b="1" i="0">
-                <a:solidFill>
-                  <a:srgbClr val="8F989D"/>
-                </a:solidFill>
-                <a:latin typeface="Calibri"/>
-              </a:rPr>
-              <a:t>Inicio 5:10 pm</a:t>
-            </a:r>
-          </a:p>
-        </p:txBody>
-      </p:sp>
-      <p:sp>
-        <p:nvSpPr>
-          <p:cNvPr id="6" name="TextBox 5"/>
-          <p:cNvSpPr txBox="1"/>
-          <p:nvPr/>
-        </p:nvSpPr>
-        <p:spPr>
-          <a:xfrm>
             <a:off x="11094415" y="6446520"/>
             <a:ext cx="548640" cy="274320"/>
           </a:xfrm>
@@ -12230,41 +11600,6 @@
       <p:sp>
         <p:nvSpPr>
           <p:cNvPr id="5" name="TextBox 4"/>
-          <p:cNvSpPr txBox="1"/>
-          <p:nvPr/>
-        </p:nvSpPr>
-        <p:spPr>
-          <a:xfrm>
-            <a:off x="2194560" y="6446520"/>
-            <a:ext cx="5943600" cy="274320"/>
-          </a:xfrm>
-          <a:prstGeom prst="rect">
-            <a:avLst/>
-          </a:prstGeom>
-          <a:noFill/>
-        </p:spPr>
-        <p:txBody>
-          <a:bodyPr wrap="square" anchor="t" lIns="0" rIns="0" tIns="0" bIns="0">
-            <a:spAutoFit/>
-          </a:bodyPr>
-          <a:lstStyle/>
-          <a:p>
-            <a:pPr algn="l"/>
-            <a:r>
-              <a:rPr sz="1000" b="1" i="0">
-                <a:solidFill>
-                  <a:srgbClr val="8F989D"/>
-                </a:solidFill>
-                <a:latin typeface="Calibri"/>
-              </a:rPr>
-              <a:t>Inicio 5:10 pm</a:t>
-            </a:r>
-          </a:p>
-        </p:txBody>
-      </p:sp>
-      <p:sp>
-        <p:nvSpPr>
-          <p:cNvPr id="6" name="TextBox 5"/>
           <p:cNvSpPr txBox="1"/>
           <p:nvPr/>
         </p:nvSpPr>
@@ -12986,41 +12321,6 @@
         </p:nvSpPr>
         <p:spPr>
           <a:xfrm>
-            <a:off x="2194560" y="6446520"/>
-            <a:ext cx="5943600" cy="274320"/>
-          </a:xfrm>
-          <a:prstGeom prst="rect">
-            <a:avLst/>
-          </a:prstGeom>
-          <a:noFill/>
-        </p:spPr>
-        <p:txBody>
-          <a:bodyPr wrap="square" anchor="t" lIns="0" rIns="0" tIns="0" bIns="0">
-            <a:spAutoFit/>
-          </a:bodyPr>
-          <a:lstStyle/>
-          <a:p>
-            <a:pPr algn="l"/>
-            <a:r>
-              <a:rPr sz="1000" b="1" i="0">
-                <a:solidFill>
-                  <a:srgbClr val="8F989D"/>
-                </a:solidFill>
-                <a:latin typeface="Calibri"/>
-              </a:rPr>
-              <a:t>Inicio 5:10 pm</a:t>
-            </a:r>
-          </a:p>
-        </p:txBody>
-      </p:sp>
-      <p:sp>
-        <p:nvSpPr>
-          <p:cNvPr id="7" name="TextBox 6"/>
-          <p:cNvSpPr txBox="1"/>
-          <p:nvPr/>
-        </p:nvSpPr>
-        <p:spPr>
-          <a:xfrm>
             <a:off x="11094415" y="6446520"/>
             <a:ext cx="548640" cy="274320"/>
           </a:xfrm>
@@ -13485,41 +12785,6 @@
       <p:sp>
         <p:nvSpPr>
           <p:cNvPr id="5" name="TextBox 4"/>
-          <p:cNvSpPr txBox="1"/>
-          <p:nvPr/>
-        </p:nvSpPr>
-        <p:spPr>
-          <a:xfrm>
-            <a:off x="2194560" y="6446520"/>
-            <a:ext cx="5943600" cy="274320"/>
-          </a:xfrm>
-          <a:prstGeom prst="rect">
-            <a:avLst/>
-          </a:prstGeom>
-          <a:noFill/>
-        </p:spPr>
-        <p:txBody>
-          <a:bodyPr wrap="square" anchor="t" lIns="0" rIns="0" tIns="0" bIns="0">
-            <a:spAutoFit/>
-          </a:bodyPr>
-          <a:lstStyle/>
-          <a:p>
-            <a:pPr algn="l"/>
-            <a:r>
-              <a:rPr sz="1000" b="1" i="0">
-                <a:solidFill>
-                  <a:srgbClr val="8F989D"/>
-                </a:solidFill>
-                <a:latin typeface="Calibri"/>
-              </a:rPr>
-              <a:t>Inicio 5:10 pm</a:t>
-            </a:r>
-          </a:p>
-        </p:txBody>
-      </p:sp>
-      <p:sp>
-        <p:nvSpPr>
-          <p:cNvPr id="6" name="TextBox 5"/>
           <p:cNvSpPr txBox="1"/>
           <p:nvPr/>
         </p:nvSpPr>

--- a/Pregrado/Trabajo de grado 3/Clases/Sesion 13 - Entregables para repositorio institucional/Presentacion.pptx
+++ b/Pregrado/Trabajo de grado 3/Clases/Sesion 13 - Entregables para repositorio institucional/Presentacion.pptx
@@ -26,6 +26,7 @@
     <p:sldId id="274" r:id="rId25"/>
     <p:sldId id="275" r:id="rId26"/>
     <p:sldId id="276" r:id="rId27"/>
+    <p:sldId id="277" r:id="rId28"/>
   </p:sldIdLst>
   <p:sldSz cx="12191695" cy="6858000" type="screen4x3"/>
   <p:notesSz cx="6858000" cy="9144000"/>
@@ -4704,7 +4705,7 @@
                 </a:solidFill>
                 <a:latin typeface="Calibri"/>
               </a:rPr>
-              <a:t>Sin metadatos su artículo es </a:t>
+              <a:t>Sin metadatos su documento es </a:t>
             </a:r>
             <a:r>
               <a:rPr sz="1300" b="1" i="0">
@@ -5499,7 +5500,7 @@
                 </a:solidFill>
                 <a:latin typeface="Calibri"/>
               </a:rPr>
-              <a:t>Las palabras clave del formulario y las del artículo </a:t>
+              <a:t>Las palabras clave del formulario y las del documento </a:t>
             </a:r>
             <a:r>
               <a:rPr sz="1300" b="1" i="0">
@@ -5766,7 +5767,7 @@
                 </a:solidFill>
                 <a:latin typeface="Calibri"/>
               </a:rPr>
-              <a:t> Meta ahí, y solo ahí, las piezas definitivas: artículo PDF, anexos, póster, autorización y, si el curso lo exige, el informe de similitud.</a:t>
+              <a:t> Meta ahí, y solo ahí, las piezas definitivas: documento PDF, anexos, póster, autorización y, si el curso lo exige, el informe de similitud.</a:t>
             </a:r>
           </a:p>
           <a:p>
@@ -5940,7 +5941,7 @@
                 </a:solidFill>
                 <a:latin typeface="Calibri"/>
               </a:rPr>
-              <a:t> copiando del artículo: título, autoría, resumen y palabras clave.</a:t>
+              <a:t> copiando del documento: título, autoría, resumen y palabras clave.</a:t>
             </a:r>
           </a:p>
           <a:p>
@@ -6252,7 +6253,7 @@
                 </a:solidFill>
                 <a:latin typeface="Calibri"/>
               </a:rPr>
-              <a:t>TALLER — Paquete para el repositorio (20 minutos)</a:t>
+              <a:t>TALLER · Paquete para el repositorio</a:t>
             </a:r>
           </a:p>
         </p:txBody>
@@ -6265,8 +6266,8 @@
         </p:nvSpPr>
         <p:spPr>
           <a:xfrm>
-            <a:off x="640080" y="1691639"/>
-            <a:ext cx="10911535" cy="4617720"/>
+            <a:off x="640080" y="1280160"/>
+            <a:ext cx="10911535" cy="411480"/>
           </a:xfrm>
           <a:prstGeom prst="rect">
             <a:avLst/>
@@ -6279,6 +6280,41 @@
           </a:bodyPr>
           <a:lstStyle/>
           <a:p>
+            <a:pPr algn="ctr"/>
+            <a:r>
+              <a:rPr sz="1500" b="0" i="0">
+                <a:solidFill>
+                  <a:srgbClr val="2B2B2B"/>
+                </a:solidFill>
+                <a:latin typeface="Calibri"/>
+              </a:rPr>
+              <a:t>Individual · el Docente acompaña resolviendo dudas del instructivo</a:t>
+            </a:r>
+          </a:p>
+        </p:txBody>
+      </p:sp>
+      <p:sp>
+        <p:nvSpPr>
+          <p:cNvPr id="5" name="TextBox 4"/>
+          <p:cNvSpPr txBox="1"/>
+          <p:nvPr/>
+        </p:nvSpPr>
+        <p:spPr>
+          <a:xfrm>
+            <a:off x="640080" y="2011679"/>
+            <a:ext cx="10911535" cy="4297680"/>
+          </a:xfrm>
+          <a:prstGeom prst="rect">
+            <a:avLst/>
+          </a:prstGeom>
+          <a:noFill/>
+        </p:spPr>
+        <p:txBody>
+          <a:bodyPr wrap="square" anchor="t" lIns="0" rIns="0" tIns="0" bIns="0">
+            <a:spAutoFit/>
+          </a:bodyPr>
+          <a:lstStyle/>
+          <a:p>
             <a:pPr>
               <a:spcAft>
                 <a:spcPts val="1000"/>
@@ -6300,7 +6336,7 @@
                 </a:solidFill>
                 <a:latin typeface="Calibri"/>
               </a:rPr>
-              <a:t>Consigna literal.</a:t>
+              <a:t>Al final tiene:</a:t>
             </a:r>
             <a:r>
               <a:rPr sz="1600" b="0" i="0">
@@ -6309,215 +6345,7 @@
                 </a:solidFill>
                 <a:latin typeface="Calibri"/>
               </a:rPr>
-              <a:t> Entregue </a:t>
-            </a:r>
-            <a:r>
-              <a:rPr sz="1600" b="1" i="0">
-                <a:solidFill>
-                  <a:srgbClr val="2B2B2B"/>
-                </a:solidFill>
-                <a:latin typeface="Calibri"/>
-              </a:rPr>
-              <a:t>S13_PaqueteRepositorio_Apellido</a:t>
-            </a:r>
-            <a:r>
-              <a:rPr sz="1600" b="0" i="0">
-                <a:solidFill>
-                  <a:srgbClr val="2B2B2B"/>
-                </a:solidFill>
-                <a:latin typeface="Calibri"/>
-              </a:rPr>
-              <a:t> con:</a:t>
-            </a:r>
-          </a:p>
-          <a:p>
-            <a:pPr lvl="1">
-              <a:spcAft>
-                <a:spcPts val="600"/>
-              </a:spcAft>
-            </a:pPr>
-            <a:r>
-              <a:rPr sz="1500" b="0" i="0">
-                <a:solidFill>
-                  <a:srgbClr val="2B2B2B"/>
-                </a:solidFill>
-                <a:latin typeface="Calibri"/>
-              </a:rPr>
-              <a:t>●   </a:t>
-            </a:r>
-            <a:r>
-              <a:rPr sz="1500" b="1" i="0">
-                <a:solidFill>
-                  <a:srgbClr val="2B2B2B"/>
-                </a:solidFill>
-                <a:latin typeface="Calibri"/>
-              </a:rPr>
-              <a:t>(1) El checklist de entregables</a:t>
-            </a:r>
-            <a:r>
-              <a:rPr sz="1500" b="0" i="0">
-                <a:solidFill>
-                  <a:srgbClr val="2B2B2B"/>
-                </a:solidFill>
-                <a:latin typeface="Calibri"/>
-              </a:rPr>
-              <a:t> en tabla, con columnas entregable · requisito · </a:t>
-            </a:r>
-            <a:r>
-              <a:rPr sz="1500" b="1" i="0">
-                <a:solidFill>
-                  <a:srgbClr val="2B2B2B"/>
-                </a:solidFill>
-                <a:latin typeface="Calibri"/>
-              </a:rPr>
-              <a:t>estado (listo / falta / en trámite)</a:t>
-            </a:r>
-            <a:r>
-              <a:rPr sz="1500" b="0" i="0">
-                <a:solidFill>
-                  <a:srgbClr val="2B2B2B"/>
-                </a:solidFill>
-                <a:latin typeface="Calibri"/>
-              </a:rPr>
-              <a:t> · responsable. Debe cubrir las seis piezas del paquete.</a:t>
-            </a:r>
-          </a:p>
-          <a:p>
-            <a:pPr lvl="1">
-              <a:spcAft>
-                <a:spcPts val="600"/>
-              </a:spcAft>
-            </a:pPr>
-            <a:r>
-              <a:rPr sz="1500" b="0" i="0">
-                <a:solidFill>
-                  <a:srgbClr val="2B2B2B"/>
-                </a:solidFill>
-                <a:latin typeface="Calibri"/>
-              </a:rPr>
-              <a:t>●   </a:t>
-            </a:r>
-            <a:r>
-              <a:rPr sz="1500" b="1" i="0">
-                <a:solidFill>
-                  <a:srgbClr val="2B2B2B"/>
-                </a:solidFill>
-                <a:latin typeface="Calibri"/>
-              </a:rPr>
-              <a:t>(2) La ficha de metadatos</a:t>
-            </a:r>
-            <a:r>
-              <a:rPr sz="1500" b="0" i="0">
-                <a:solidFill>
-                  <a:srgbClr val="2B2B2B"/>
-                </a:solidFill>
-                <a:latin typeface="Calibri"/>
-              </a:rPr>
-              <a:t> completa: título, autoría, resumen íntegro y las palabras clave UNESCO, copiados del artículo.</a:t>
-            </a:r>
-          </a:p>
-          <a:p>
-            <a:pPr lvl="1">
-              <a:spcAft>
-                <a:spcPts val="600"/>
-              </a:spcAft>
-            </a:pPr>
-            <a:r>
-              <a:rPr sz="1500" b="0" i="0">
-                <a:solidFill>
-                  <a:srgbClr val="2B2B2B"/>
-                </a:solidFill>
-                <a:latin typeface="Calibri"/>
-              </a:rPr>
-              <a:t>●   </a:t>
-            </a:r>
-            <a:r>
-              <a:rPr sz="1500" b="1" i="0">
-                <a:solidFill>
-                  <a:srgbClr val="2B2B2B"/>
-                </a:solidFill>
-                <a:latin typeface="Calibri"/>
-              </a:rPr>
-              <a:t>(3) El acta de revisión de forma</a:t>
-            </a:r>
-            <a:r>
-              <a:rPr sz="1500" b="0" i="0">
-                <a:solidFill>
-                  <a:srgbClr val="2B2B2B"/>
-                </a:solidFill>
-                <a:latin typeface="Calibri"/>
-              </a:rPr>
-              <a:t>: los nueve puntos del recorrido, cada uno marcado como revisado o corregido, hecho </a:t>
-            </a:r>
-            <a:r>
-              <a:rPr sz="1500" b="1" i="0">
-                <a:solidFill>
-                  <a:srgbClr val="2B2B2B"/>
-                </a:solidFill>
-                <a:latin typeface="Calibri"/>
-              </a:rPr>
-              <a:t>sobre el PDF exportado</a:t>
-            </a:r>
-            <a:r>
-              <a:rPr sz="1500" b="0" i="0">
-                <a:solidFill>
-                  <a:srgbClr val="2B2B2B"/>
-                </a:solidFill>
-                <a:latin typeface="Calibri"/>
-              </a:rPr>
-              <a:t>.</a:t>
-            </a:r>
-          </a:p>
-          <a:p>
-            <a:pPr lvl="1">
-              <a:spcAft>
-                <a:spcPts val="600"/>
-              </a:spcAft>
-            </a:pPr>
-            <a:r>
-              <a:rPr sz="1500" b="0" i="0">
-                <a:solidFill>
-                  <a:srgbClr val="2B2B2B"/>
-                </a:solidFill>
-                <a:latin typeface="Calibri"/>
-              </a:rPr>
-              <a:t>●   </a:t>
-            </a:r>
-            <a:r>
-              <a:rPr sz="1500" b="1" i="0">
-                <a:solidFill>
-                  <a:srgbClr val="2B2B2B"/>
-                </a:solidFill>
-                <a:latin typeface="Calibri"/>
-              </a:rPr>
-              <a:t>(4)</a:t>
-            </a:r>
-            <a:r>
-              <a:rPr sz="1500" b="0" i="0">
-                <a:solidFill>
-                  <a:srgbClr val="2B2B2B"/>
-                </a:solidFill>
-                <a:latin typeface="Calibri"/>
-              </a:rPr>
-              <a:t> La </a:t>
-            </a:r>
-            <a:r>
-              <a:rPr sz="1500" b="1" i="0">
-                <a:solidFill>
-                  <a:srgbClr val="2B2B2B"/>
-                </a:solidFill>
-                <a:latin typeface="Calibri"/>
-              </a:rPr>
-              <a:t>ruta institucional de carga</a:t>
-            </a:r>
-            <a:r>
-              <a:rPr sz="1500" b="0" i="0">
-                <a:solidFill>
-                  <a:srgbClr val="2B2B2B"/>
-                </a:solidFill>
-                <a:latin typeface="Calibri"/>
-              </a:rPr>
-              <a:t> del semestre, anotada tal como aparece en CDigital.</a:t>
+              <a:t> el checklist de las seis piezas, la ficha de metadatos y el acta de revisión de forma.</a:t>
             </a:r>
           </a:p>
           <a:p>
@@ -6542,7 +6370,7 @@
                 </a:solidFill>
                 <a:latin typeface="Calibri"/>
               </a:rPr>
-              <a:t>Tiempo:</a:t>
+              <a:t>Paso 1</a:t>
             </a:r>
             <a:r>
               <a:rPr sz="1600" b="0" i="0">
@@ -6551,14 +6379,294 @@
                 </a:solidFill>
                 <a:latin typeface="Calibri"/>
               </a:rPr>
-              <a:t> 20 minutos. El Docente acompaña resolviendo dudas del instructivo.</a:t>
-            </a:r>
-          </a:p>
-        </p:txBody>
-      </p:sp>
-      <p:sp>
-        <p:nvSpPr>
-          <p:cNvPr id="5" name="TextBox 4"/>
+              <a:t> · </a:t>
+            </a:r>
+            <a:r>
+              <a:rPr sz="1600" b="1" i="0">
+                <a:solidFill>
+                  <a:srgbClr val="2B2B2B"/>
+                </a:solidFill>
+                <a:latin typeface="Calibri"/>
+              </a:rPr>
+              <a:t>El checklist de entregables</a:t>
+            </a:r>
+            <a:r>
+              <a:rPr sz="1600" b="0" i="0">
+                <a:solidFill>
+                  <a:srgbClr val="2B2B2B"/>
+                </a:solidFill>
+                <a:latin typeface="Calibri"/>
+              </a:rPr>
+              <a:t> en tabla —entregable · requisito · </a:t>
+            </a:r>
+            <a:r>
+              <a:rPr sz="1600" b="1" i="0">
+                <a:solidFill>
+                  <a:srgbClr val="2B2B2B"/>
+                </a:solidFill>
+                <a:latin typeface="Calibri"/>
+              </a:rPr>
+              <a:t>estado (listo / falta / en trámite)</a:t>
+            </a:r>
+            <a:r>
+              <a:rPr sz="1600" b="0" i="0">
+                <a:solidFill>
+                  <a:srgbClr val="2B2B2B"/>
+                </a:solidFill>
+                <a:latin typeface="Calibri"/>
+              </a:rPr>
+              <a:t> · responsable—, cubriendo las seis piezas del paquete.</a:t>
+            </a:r>
+          </a:p>
+          <a:p>
+            <a:pPr>
+              <a:spcAft>
+                <a:spcPts val="1000"/>
+              </a:spcAft>
+            </a:pPr>
+            <a:r>
+              <a:rPr sz="1600" b="0" i="0">
+                <a:solidFill>
+                  <a:srgbClr val="2B2B2B"/>
+                </a:solidFill>
+                <a:latin typeface="Calibri"/>
+              </a:rPr>
+              <a:t>–   </a:t>
+            </a:r>
+            <a:r>
+              <a:rPr sz="1600" b="1" i="0">
+                <a:solidFill>
+                  <a:srgbClr val="2B2B2B"/>
+                </a:solidFill>
+                <a:latin typeface="Calibri"/>
+              </a:rPr>
+              <a:t>Paso 2</a:t>
+            </a:r>
+            <a:r>
+              <a:rPr sz="1600" b="0" i="0">
+                <a:solidFill>
+                  <a:srgbClr val="2B2B2B"/>
+                </a:solidFill>
+                <a:latin typeface="Calibri"/>
+              </a:rPr>
+              <a:t> · </a:t>
+            </a:r>
+            <a:r>
+              <a:rPr sz="1600" b="1" i="0">
+                <a:solidFill>
+                  <a:srgbClr val="2B2B2B"/>
+                </a:solidFill>
+                <a:latin typeface="Calibri"/>
+              </a:rPr>
+              <a:t>La ficha de metadatos</a:t>
+            </a:r>
+            <a:r>
+              <a:rPr sz="1600" b="0" i="0">
+                <a:solidFill>
+                  <a:srgbClr val="2B2B2B"/>
+                </a:solidFill>
+                <a:latin typeface="Calibri"/>
+              </a:rPr>
+              <a:t> completa: título, autoría, resumen íntegro y palabras clave UNESCO, </a:t>
+            </a:r>
+            <a:r>
+              <a:rPr sz="1600" b="1" i="0">
+                <a:solidFill>
+                  <a:srgbClr val="2B2B2B"/>
+                </a:solidFill>
+                <a:latin typeface="Calibri"/>
+              </a:rPr>
+              <a:t>copiados</a:t>
+            </a:r>
+            <a:r>
+              <a:rPr sz="1600" b="0" i="0">
+                <a:solidFill>
+                  <a:srgbClr val="2B2B2B"/>
+                </a:solidFill>
+                <a:latin typeface="Calibri"/>
+              </a:rPr>
+              <a:t> del documento.</a:t>
+            </a:r>
+          </a:p>
+          <a:p>
+            <a:pPr>
+              <a:spcAft>
+                <a:spcPts val="1000"/>
+              </a:spcAft>
+            </a:pPr>
+            <a:r>
+              <a:rPr sz="1600" b="0" i="0">
+                <a:solidFill>
+                  <a:srgbClr val="2B2B2B"/>
+                </a:solidFill>
+                <a:latin typeface="Calibri"/>
+              </a:rPr>
+              <a:t>–   </a:t>
+            </a:r>
+            <a:r>
+              <a:rPr sz="1600" b="1" i="0">
+                <a:solidFill>
+                  <a:srgbClr val="2B2B2B"/>
+                </a:solidFill>
+                <a:latin typeface="Calibri"/>
+              </a:rPr>
+              <a:t>Paso 3</a:t>
+            </a:r>
+            <a:r>
+              <a:rPr sz="1600" b="0" i="0">
+                <a:solidFill>
+                  <a:srgbClr val="2B2B2B"/>
+                </a:solidFill>
+                <a:latin typeface="Calibri"/>
+              </a:rPr>
+              <a:t> · </a:t>
+            </a:r>
+            <a:r>
+              <a:rPr sz="1600" b="1" i="0">
+                <a:solidFill>
+                  <a:srgbClr val="2B2B2B"/>
+                </a:solidFill>
+                <a:latin typeface="Calibri"/>
+              </a:rPr>
+              <a:t>El acta de revisión de forma</a:t>
+            </a:r>
+            <a:r>
+              <a:rPr sz="1600" b="0" i="0">
+                <a:solidFill>
+                  <a:srgbClr val="2B2B2B"/>
+                </a:solidFill>
+                <a:latin typeface="Calibri"/>
+              </a:rPr>
+              <a:t>: los nueve puntos del recorrido, cada uno marcado como revisado o corregido, hecho </a:t>
+            </a:r>
+            <a:r>
+              <a:rPr sz="1600" b="1" i="0">
+                <a:solidFill>
+                  <a:srgbClr val="2B2B2B"/>
+                </a:solidFill>
+                <a:latin typeface="Calibri"/>
+              </a:rPr>
+              <a:t>sobre el PDF exportado</a:t>
+            </a:r>
+            <a:r>
+              <a:rPr sz="1600" b="0" i="0">
+                <a:solidFill>
+                  <a:srgbClr val="2B2B2B"/>
+                </a:solidFill>
+                <a:latin typeface="Calibri"/>
+              </a:rPr>
+              <a:t>.</a:t>
+            </a:r>
+          </a:p>
+          <a:p>
+            <a:pPr>
+              <a:spcAft>
+                <a:spcPts val="1000"/>
+              </a:spcAft>
+            </a:pPr>
+            <a:r>
+              <a:rPr sz="1600" b="0" i="0">
+                <a:solidFill>
+                  <a:srgbClr val="2B2B2B"/>
+                </a:solidFill>
+                <a:latin typeface="Calibri"/>
+              </a:rPr>
+              <a:t>–   </a:t>
+            </a:r>
+            <a:r>
+              <a:rPr sz="1600" b="1" i="0">
+                <a:solidFill>
+                  <a:srgbClr val="2B2B2B"/>
+                </a:solidFill>
+                <a:latin typeface="Calibri"/>
+              </a:rPr>
+              <a:t>Paso 4</a:t>
+            </a:r>
+            <a:r>
+              <a:rPr sz="1600" b="0" i="0">
+                <a:solidFill>
+                  <a:srgbClr val="2B2B2B"/>
+                </a:solidFill>
+                <a:latin typeface="Calibri"/>
+              </a:rPr>
+              <a:t> · La </a:t>
+            </a:r>
+            <a:r>
+              <a:rPr sz="1600" b="1" i="0">
+                <a:solidFill>
+                  <a:srgbClr val="2B2B2B"/>
+                </a:solidFill>
+                <a:latin typeface="Calibri"/>
+              </a:rPr>
+              <a:t>ruta institucional de carga</a:t>
+            </a:r>
+            <a:r>
+              <a:rPr sz="1600" b="0" i="0">
+                <a:solidFill>
+                  <a:srgbClr val="2B2B2B"/>
+                </a:solidFill>
+                <a:latin typeface="Calibri"/>
+              </a:rPr>
+              <a:t> del semestre, anotada tal como aparece en CDigital.</a:t>
+            </a:r>
+          </a:p>
+          <a:p>
+            <a:pPr>
+              <a:spcAft>
+                <a:spcPts val="1000"/>
+              </a:spcAft>
+            </a:pPr>
+            <a:r>
+              <a:rPr sz="1600" b="0" i="0">
+                <a:solidFill>
+                  <a:srgbClr val="2B2B2B"/>
+                </a:solidFill>
+                <a:latin typeface="Calibri"/>
+              </a:rPr>
+              <a:t>–   </a:t>
+            </a:r>
+            <a:r>
+              <a:rPr sz="1600" b="1" i="0">
+                <a:solidFill>
+                  <a:srgbClr val="2B2B2B"/>
+                </a:solidFill>
+                <a:latin typeface="Calibri"/>
+              </a:rPr>
+              <a:t>En clase, sin falta:</a:t>
+            </a:r>
+            <a:r>
+              <a:rPr sz="1600" b="0" i="0">
+                <a:solidFill>
+                  <a:srgbClr val="2B2B2B"/>
+                </a:solidFill>
+                <a:latin typeface="Calibri"/>
+              </a:rPr>
+              <a:t> los </a:t>
+            </a:r>
+            <a:r>
+              <a:rPr sz="1600" b="1" i="0">
+                <a:solidFill>
+                  <a:srgbClr val="2B2B2B"/>
+                </a:solidFill>
+                <a:latin typeface="Calibri"/>
+              </a:rPr>
+              <a:t>pasos 1 a 3</a:t>
+            </a:r>
+            <a:r>
+              <a:rPr sz="1600" b="0" i="0">
+                <a:solidFill>
+                  <a:srgbClr val="2B2B2B"/>
+                </a:solidFill>
+                <a:latin typeface="Calibri"/>
+              </a:rPr>
+              <a:t>. Del 4 en adelante puede quedar en trabajo autónomo, pero antes de la próxima sesión.</a:t>
+            </a:r>
+          </a:p>
+        </p:txBody>
+      </p:sp>
+      <p:sp>
+        <p:nvSpPr>
+          <p:cNvPr id="6" name="TextBox 5"/>
           <p:cNvSpPr txBox="1"/>
           <p:nvPr/>
         </p:nvSpPr>
@@ -6691,7 +6799,7 @@
                 </a:solidFill>
                 <a:latin typeface="Calibri"/>
               </a:rPr>
-              <a:t>TALLER — Paquete para el repositorio (20 minutos) (cont.)</a:t>
+              <a:t>TALLER · cómo se revisa y dónde se entrega</a:t>
             </a:r>
           </a:p>
         </p:txBody>
@@ -6704,8 +6812,8 @@
         </p:nvSpPr>
         <p:spPr>
           <a:xfrm>
-            <a:off x="640080" y="1691639"/>
-            <a:ext cx="10911535" cy="4617720"/>
+            <a:off x="640080" y="1280160"/>
+            <a:ext cx="10911535" cy="411480"/>
           </a:xfrm>
           <a:prstGeom prst="rect">
             <a:avLst/>
@@ -6718,6 +6826,41 @@
           </a:bodyPr>
           <a:lstStyle/>
           <a:p>
+            <a:pPr algn="ctr"/>
+            <a:r>
+              <a:rPr sz="1500" b="0" i="0">
+                <a:solidFill>
+                  <a:srgbClr val="2B2B2B"/>
+                </a:solidFill>
+                <a:latin typeface="Calibri"/>
+              </a:rPr>
+              <a:t>Paquete para el repositorio</a:t>
+            </a:r>
+          </a:p>
+        </p:txBody>
+      </p:sp>
+      <p:sp>
+        <p:nvSpPr>
+          <p:cNvPr id="5" name="TextBox 4"/>
+          <p:cNvSpPr txBox="1"/>
+          <p:nvPr/>
+        </p:nvSpPr>
+        <p:spPr>
+          <a:xfrm>
+            <a:off x="640080" y="2011679"/>
+            <a:ext cx="10911535" cy="4297680"/>
+          </a:xfrm>
+          <a:prstGeom prst="rect">
+            <a:avLst/>
+          </a:prstGeom>
+          <a:noFill/>
+        </p:spPr>
+        <p:txBody>
+          <a:bodyPr wrap="square" anchor="t" lIns="0" rIns="0" tIns="0" bIns="0">
+            <a:spAutoFit/>
+          </a:bodyPr>
+          <a:lstStyle/>
+          <a:p>
             <a:pPr>
               <a:spcAft>
                 <a:spcPts val="1000"/>
@@ -6739,7 +6882,16 @@
                 </a:solidFill>
                 <a:latin typeface="Calibri"/>
               </a:rPr>
-              <a:t>Criterio de éxito (verificable):</a:t>
+              <a:t>Quedó bien si</a:t>
+            </a:r>
+            <a:r>
+              <a:rPr sz="1600" b="0" i="0">
+                <a:solidFill>
+                  <a:srgbClr val="2B2B2B"/>
+                </a:solidFill>
+                <a:latin typeface="Calibri"/>
+              </a:rPr>
+              <a:t> —compruébelo usted antes de cerrar el documento—:</a:t>
             </a:r>
           </a:p>
           <a:p>
@@ -6798,7 +6950,7 @@
                 </a:solidFill>
                 <a:latin typeface="Calibri"/>
               </a:rPr>
-              <a:t>completos y copiados del artículo</a:t>
+              <a:t>completos y copiados</a:t>
             </a:r>
             <a:r>
               <a:rPr sz="1500" b="0" i="0">
@@ -6807,7 +6959,7 @@
                 </a:solidFill>
                 <a:latin typeface="Calibri"/>
               </a:rPr>
-              <a:t>, no reescritos.</a:t>
+              <a:t> del documento, no reescritos.</a:t>
             </a:r>
           </a:p>
           <a:p>
@@ -6832,7 +6984,7 @@
                 </a:solidFill>
                 <a:latin typeface="Calibri"/>
               </a:rPr>
-              <a:t>final</a:t>
+              <a:t>final en PDF</a:t>
             </a:r>
             <a:r>
               <a:rPr sz="1500" b="0" i="0">
@@ -6841,7 +6993,7 @@
                 </a:solidFill>
                 <a:latin typeface="Calibri"/>
               </a:rPr>
-              <a:t> en PDF, no un borrador.</a:t>
+              <a:t>, no un borrador.</a:t>
             </a:r>
           </a:p>
           <a:p>
@@ -6875,14 +7027,170 @@
                 </a:solidFill>
                 <a:latin typeface="Calibri"/>
               </a:rPr>
-              <a:t> con las del artículo.</a:t>
-            </a:r>
-          </a:p>
-        </p:txBody>
-      </p:sp>
-      <p:sp>
-        <p:nvSpPr>
-          <p:cNvPr id="5" name="TextBox 4"/>
+              <a:t> con las del documento.</a:t>
+            </a:r>
+          </a:p>
+          <a:p>
+            <a:pPr>
+              <a:spcAft>
+                <a:spcPts val="1000"/>
+              </a:spcAft>
+            </a:pPr>
+            <a:r>
+              <a:rPr sz="1600" b="0" i="0">
+                <a:solidFill>
+                  <a:srgbClr val="2B2B2B"/>
+                </a:solidFill>
+                <a:latin typeface="Calibri"/>
+              </a:rPr>
+              <a:t>–   </a:t>
+            </a:r>
+            <a:r>
+              <a:rPr sz="1600" b="1" i="0">
+                <a:solidFill>
+                  <a:srgbClr val="2B2B2B"/>
+                </a:solidFill>
+                <a:latin typeface="Calibri"/>
+              </a:rPr>
+              <a:t>Plan B:</a:t>
+            </a:r>
+            <a:r>
+              <a:rPr sz="1600" b="0" i="0">
+                <a:solidFill>
+                  <a:srgbClr val="2B2B2B"/>
+                </a:solidFill>
+                <a:latin typeface="Calibri"/>
+              </a:rPr>
+              <a:t> Si le falta una firma o un formato en trámite, eso </a:t>
+            </a:r>
+            <a:r>
+              <a:rPr sz="1600" b="1" i="0">
+                <a:solidFill>
+                  <a:srgbClr val="2B2B2B"/>
+                </a:solidFill>
+                <a:latin typeface="Calibri"/>
+              </a:rPr>
+              <a:t>también es un resultado válido</a:t>
+            </a:r>
+            <a:r>
+              <a:rPr sz="1600" b="0" i="0">
+                <a:solidFill>
+                  <a:srgbClr val="2B2B2B"/>
+                </a:solidFill>
+                <a:latin typeface="Calibri"/>
+              </a:rPr>
+              <a:t>: quedó identificado y con responsable, que es justamente el punto.</a:t>
+            </a:r>
+          </a:p>
+          <a:p>
+            <a:pPr>
+              <a:spcAft>
+                <a:spcPts val="1000"/>
+              </a:spcAft>
+            </a:pPr>
+            <a:r>
+              <a:rPr sz="1600" b="0" i="0">
+                <a:solidFill>
+                  <a:srgbClr val="2B2B2B"/>
+                </a:solidFill>
+                <a:latin typeface="Calibri"/>
+              </a:rPr>
+              <a:t>–   </a:t>
+            </a:r>
+            <a:r>
+              <a:rPr sz="1600" b="1" i="0">
+                <a:solidFill>
+                  <a:srgbClr val="2B2B2B"/>
+                </a:solidFill>
+                <a:latin typeface="Calibri"/>
+              </a:rPr>
+              <a:t>Entrega:</a:t>
+            </a:r>
+            <a:r>
+              <a:rPr sz="1600" b="0" i="0">
+                <a:solidFill>
+                  <a:srgbClr val="2B2B2B"/>
+                </a:solidFill>
+                <a:latin typeface="Calibri"/>
+              </a:rPr>
+              <a:t> suba `S13_PaqueteRepositorio_Apellido` (Google Doc o PDF + el documento final en PDF) como </a:t>
+            </a:r>
+            <a:r>
+              <a:rPr sz="1600" b="1" i="0">
+                <a:solidFill>
+                  <a:srgbClr val="2B2B2B"/>
+                </a:solidFill>
+                <a:latin typeface="Calibri"/>
+              </a:rPr>
+              <a:t>ACA Final</a:t>
+            </a:r>
+            <a:r>
+              <a:rPr sz="1600" b="0" i="0">
+                <a:solidFill>
+                  <a:srgbClr val="2B2B2B"/>
+                </a:solidFill>
+                <a:latin typeface="Calibri"/>
+              </a:rPr>
+              <a:t> —tarea, 32%— en </a:t>
+            </a:r>
+            <a:r>
+              <a:rPr sz="1600" b="1" i="0">
+                <a:solidFill>
+                  <a:srgbClr val="2B2B2B"/>
+                </a:solidFill>
+                <a:latin typeface="Calibri"/>
+              </a:rPr>
+              <a:t>el aula de su grupo</a:t>
+            </a:r>
+            <a:r>
+              <a:rPr sz="1600" b="0" i="0">
+                <a:solidFill>
+                  <a:srgbClr val="2B2B2B"/>
+                </a:solidFill>
+                <a:latin typeface="Calibri"/>
+              </a:rPr>
+              <a:t> en CDigital.</a:t>
+            </a:r>
+          </a:p>
+          <a:p>
+            <a:pPr>
+              <a:spcAft>
+                <a:spcPts val="1000"/>
+              </a:spcAft>
+            </a:pPr>
+            <a:r>
+              <a:rPr sz="1600" b="0" i="0">
+                <a:solidFill>
+                  <a:srgbClr val="2B2B2B"/>
+                </a:solidFill>
+                <a:latin typeface="Calibri"/>
+              </a:rPr>
+              <a:t>–   </a:t>
+            </a:r>
+            <a:r>
+              <a:rPr sz="1600" b="1" i="0">
+                <a:solidFill>
+                  <a:srgbClr val="2B2B2B"/>
+                </a:solidFill>
+                <a:latin typeface="Calibri"/>
+              </a:rPr>
+              <a:t>Verifique el estado:</a:t>
+            </a:r>
+            <a:r>
+              <a:rPr sz="1600" b="0" i="0">
+                <a:solidFill>
+                  <a:srgbClr val="2B2B2B"/>
+                </a:solidFill>
+                <a:latin typeface="Calibri"/>
+              </a:rPr>
+              <a:t> *subido* no es lo mismo que *entregado*. Lo que no esté en el aula, no está entregado.</a:t>
+            </a:r>
+          </a:p>
+        </p:txBody>
+      </p:sp>
+      <p:sp>
+        <p:nvSpPr>
+          <p:cNvPr id="6" name="TextBox 5"/>
           <p:cNvSpPr txBox="1"/>
           <p:nvPr/>
         </p:nvSpPr>
@@ -6911,58 +7219,6 @@
                 <a:latin typeface="Calibri"/>
               </a:rPr>
               <a:t>17</a:t>
-            </a:r>
-          </a:p>
-        </p:txBody>
-      </p:sp>
-      <p:sp>
-        <p:nvSpPr>
-          <p:cNvPr id="6" name="TextBox 5"/>
-          <p:cNvSpPr txBox="1"/>
-          <p:nvPr/>
-        </p:nvSpPr>
-        <p:spPr>
-          <a:xfrm>
-            <a:off x="640080" y="5943600"/>
-            <a:ext cx="9997135" cy="457200"/>
-          </a:xfrm>
-          <a:prstGeom prst="rect">
-            <a:avLst/>
-          </a:prstGeom>
-          <a:noFill/>
-        </p:spPr>
-        <p:txBody>
-          <a:bodyPr wrap="square" anchor="t" lIns="0" rIns="0" tIns="0" bIns="0">
-            <a:spAutoFit/>
-          </a:bodyPr>
-          <a:lstStyle/>
-          <a:p>
-            <a:r>
-              <a:rPr sz="1200" b="0" i="1">
-                <a:solidFill>
-                  <a:srgbClr val="2B2B2B"/>
-                </a:solidFill>
-                <a:latin typeface="Calibri"/>
-              </a:rPr>
-              <a:t>Si le falta una firma o un formato en trámite, eso </a:t>
-            </a:r>
-            <a:r>
-              <a:rPr sz="1200" b="1" i="1">
-                <a:solidFill>
-                  <a:srgbClr val="2B2B2B"/>
-                </a:solidFill>
-                <a:latin typeface="Calibri"/>
-              </a:rPr>
-              <a:t>también es un resultado válido</a:t>
-            </a:r>
-            <a:r>
-              <a:rPr sz="1200" b="0" i="1">
-                <a:solidFill>
-                  <a:srgbClr val="2B2B2B"/>
-                </a:solidFill>
-                <a:latin typeface="Calibri"/>
-              </a:rPr>
-              <a:t> del taller: quedó identificado y con responsable, que es justamente el punto.</a:t>
             </a:r>
           </a:p>
         </p:txBody>
@@ -8669,7 +8925,25 @@
                 </a:solidFill>
                 <a:latin typeface="Calibri"/>
               </a:rPr>
-              <a:t>, publicados en CDigital — [URL CDigital — campus del curso pendiente]. No se usan enlaces de terceros.</a:t>
+              <a:t>, publicados en CDigital — el aula de </a:t>
+            </a:r>
+            <a:r>
+              <a:rPr sz="1200" b="1" i="1">
+                <a:solidFill>
+                  <a:srgbClr val="2B2B2B"/>
+                </a:solidFill>
+                <a:latin typeface="Calibri"/>
+              </a:rPr>
+              <a:t>su grupo</a:t>
+            </a:r>
+            <a:r>
+              <a:rPr sz="1200" b="0" i="1">
+                <a:solidFill>
+                  <a:srgbClr val="2B2B2B"/>
+                </a:solidFill>
+                <a:latin typeface="Calibri"/>
+              </a:rPr>
+              <a:t> en CDigital. No se usan enlaces de terceros.</a:t>
             </a:r>
           </a:p>
         </p:txBody>
@@ -8831,7 +9105,25 @@
                 </a:solidFill>
                 <a:latin typeface="Calibri"/>
               </a:rPr>
-              <a:t> `S13_PaqueteRepositorio_Apellido` a CDigital — [URL CDigital — campus del curso pendiente].</a:t>
+              <a:t> `S13_PaqueteRepositorio_Apellido` a CDigital — el aula de </a:t>
+            </a:r>
+            <a:r>
+              <a:rPr sz="1600" b="1" i="0">
+                <a:solidFill>
+                  <a:srgbClr val="2B2B2B"/>
+                </a:solidFill>
+                <a:latin typeface="Calibri"/>
+              </a:rPr>
+              <a:t>su grupo</a:t>
+            </a:r>
+            <a:r>
+              <a:rPr sz="1600" b="0" i="0">
+                <a:solidFill>
+                  <a:srgbClr val="2B2B2B"/>
+                </a:solidFill>
+                <a:latin typeface="Calibri"/>
+              </a:rPr>
+              <a:t> en CDigital.</a:t>
             </a:r>
           </a:p>
           <a:p>
@@ -8933,7 +9225,7 @@
                 </a:solidFill>
                 <a:latin typeface="Calibri"/>
               </a:rPr>
-              <a:t> una última vez que las palabras clave del artículo, del resumen y de la ficha son las mismas tres veces.</a:t>
+              <a:t> una última vez que las palabras clave del documento, del resumen y de la ficha son las mismas tres veces.</a:t>
             </a:r>
           </a:p>
           <a:p>
@@ -9102,6 +9394,1214 @@
 </file>
 
 <file path=ppt/slides/slide21.xml><?xml version="1.0" encoding="utf-8"?>
+<p:sld xmlns:a="http://schemas.openxmlformats.org/drawingml/2006/main" xmlns:p="http://schemas.openxmlformats.org/presentationml/2006/main" xmlns:r="http://schemas.openxmlformats.org/officeDocument/2006/relationships">
+  <p:cSld>
+    <p:bg>
+      <p:bgPr>
+        <a:solidFill>
+          <a:srgbClr val="FFFFFF"/>
+        </a:solidFill>
+        <a:effectLst/>
+      </p:bgPr>
+    </p:bg>
+    <p:spTree>
+      <p:nvGrpSpPr>
+        <p:cNvPr id="1" name=""/>
+        <p:cNvGrpSpPr/>
+        <p:nvPr/>
+      </p:nvGrpSpPr>
+      <p:grpSpPr/>
+      <p:sp>
+        <p:nvSpPr>
+          <p:cNvPr id="2" name="Rectangle 1"/>
+          <p:cNvSpPr/>
+          <p:nvPr/>
+        </p:nvSpPr>
+        <p:spPr>
+          <a:xfrm>
+            <a:off x="0" y="0"/>
+            <a:ext cx="12191695" cy="1188720"/>
+          </a:xfrm>
+          <a:prstGeom prst="rect">
+            <a:avLst/>
+          </a:prstGeom>
+          <a:solidFill>
+            <a:srgbClr val="0C2340"/>
+          </a:solidFill>
+          <a:ln>
+            <a:noFill/>
+          </a:ln>
+          <a:effectLst/>
+        </p:spPr>
+        <p:style>
+          <a:lnRef idx="1">
+            <a:schemeClr val="accent1"/>
+          </a:lnRef>
+          <a:fillRef idx="3">
+            <a:schemeClr val="accent1"/>
+          </a:fillRef>
+          <a:effectRef idx="2">
+            <a:schemeClr val="accent1"/>
+          </a:effectRef>
+          <a:fontRef idx="minor">
+            <a:schemeClr val="lt1"/>
+          </a:fontRef>
+        </p:style>
+        <p:txBody>
+          <a:bodyPr rtlCol="0" anchor="ctr"/>
+          <a:lstStyle/>
+          <a:p>
+            <a:pPr algn="ctr"/>
+          </a:p>
+        </p:txBody>
+      </p:sp>
+      <p:sp>
+        <p:nvSpPr>
+          <p:cNvPr id="3" name="TextBox 2"/>
+          <p:cNvSpPr txBox="1"/>
+          <p:nvPr/>
+        </p:nvSpPr>
+        <p:spPr>
+          <a:xfrm>
+            <a:off x="640080" y="0"/>
+            <a:ext cx="9082735" cy="1188720"/>
+          </a:xfrm>
+          <a:prstGeom prst="rect">
+            <a:avLst/>
+          </a:prstGeom>
+          <a:noFill/>
+        </p:spPr>
+        <p:txBody>
+          <a:bodyPr wrap="square" anchor="ctr" lIns="0" rIns="0" tIns="0" bIns="0">
+            <a:spAutoFit/>
+          </a:bodyPr>
+          <a:lstStyle/>
+          <a:p>
+            <a:pPr algn="ctr"/>
+            <a:r>
+              <a:rPr sz="2600" b="1" i="0">
+                <a:solidFill>
+                  <a:srgbClr val="FFFFFF"/>
+                </a:solidFill>
+                <a:latin typeface="Calibri"/>
+              </a:rPr>
+              <a:t>RUTA DE ENTREGABLES DEL CURSO</a:t>
+            </a:r>
+          </a:p>
+        </p:txBody>
+      </p:sp>
+      <p:sp>
+        <p:nvSpPr>
+          <p:cNvPr id="4" name="TextBox 3"/>
+          <p:cNvSpPr txBox="1"/>
+          <p:nvPr/>
+        </p:nvSpPr>
+        <p:spPr>
+          <a:xfrm>
+            <a:off x="640080" y="1280160"/>
+            <a:ext cx="10911535" cy="411480"/>
+          </a:xfrm>
+          <a:prstGeom prst="rect">
+            <a:avLst/>
+          </a:prstGeom>
+          <a:noFill/>
+        </p:spPr>
+        <p:txBody>
+          <a:bodyPr wrap="square" anchor="t" lIns="0" rIns="0" tIns="0" bIns="0">
+            <a:spAutoFit/>
+          </a:bodyPr>
+          <a:lstStyle/>
+          <a:p>
+            <a:pPr algn="ctr"/>
+            <a:r>
+              <a:rPr sz="1500" b="0" i="0">
+                <a:solidFill>
+                  <a:srgbClr val="2B2B2B"/>
+                </a:solidFill>
+                <a:latin typeface="Calibri"/>
+              </a:rPr>
+              <a:t>Sin fechas a propósito: aquí va </a:t>
+            </a:r>
+            <a:r>
+              <a:rPr sz="1500" b="1" i="0">
+                <a:solidFill>
+                  <a:srgbClr val="2B2B2B"/>
+                </a:solidFill>
+                <a:latin typeface="Calibri"/>
+              </a:rPr>
+              <a:t>en qué punto del curso</a:t>
+            </a:r>
+            <a:r>
+              <a:rPr sz="1500" b="0" i="0">
+                <a:solidFill>
+                  <a:srgbClr val="2B2B2B"/>
+                </a:solidFill>
+                <a:latin typeface="Calibri"/>
+              </a:rPr>
+              <a:t> cierra cada ítem · la ventana exacta la fija CDigital</a:t>
+            </a:r>
+          </a:p>
+        </p:txBody>
+      </p:sp>
+      <p:graphicFrame>
+        <p:nvGraphicFramePr>
+          <p:cNvPr id="5" name="Table 4"/>
+          <p:cNvGraphicFramePr>
+            <a:graphicFrameLocks noGrp="1"/>
+          </p:cNvGraphicFramePr>
+          <p:nvPr/>
+        </p:nvGraphicFramePr>
+        <p:xfrm>
+          <a:off x="640080" y="2011679"/>
+          <a:ext cx="10911533" cy="4297680"/>
+        </p:xfrm>
+        <a:graphic>
+          <a:graphicData uri="http://schemas.openxmlformats.org/drawingml/2006/table">
+            <a:tbl>
+              <a:tblPr>
+                <a:tableStyleId>{2D5ABB26-0587-4C30-8999-92F81FD0307C}</a:tableStyleId>
+              </a:tblPr>
+              <a:tblGrid>
+                <a:gridCol w="2659113"/>
+                <a:gridCol w="2659113"/>
+                <a:gridCol w="5593307"/>
+              </a:tblGrid>
+              <a:tr h="477520">
+                <a:tc>
+                  <a:txBody>
+                    <a:bodyPr/>
+                    <a:lstStyle/>
+                    <a:p>
+                      <a:pPr algn="l"/>
+                      <a:r>
+                        <a:rPr sz="1300" b="1" i="0">
+                          <a:solidFill>
+                            <a:srgbClr val="FFFFFF"/>
+                          </a:solidFill>
+                          <a:latin typeface="Calibri"/>
+                        </a:rPr>
+                        <a:t>Cierra en la semana de…</a:t>
+                      </a:r>
+                    </a:p>
+                  </a:txBody>
+                  <a:tcPr anchor="ctr" marL="109728" marR="91440" marT="36576" marB="36576">
+                    <a:solidFill>
+                      <a:srgbClr val="0C2340"/>
+                    </a:solidFill>
+                  </a:tcPr>
+                </a:tc>
+                <a:tc>
+                  <a:txBody>
+                    <a:bodyPr/>
+                    <a:lstStyle/>
+                    <a:p>
+                      <a:pPr algn="l"/>
+                      <a:r>
+                        <a:rPr sz="1300" b="1" i="0">
+                          <a:solidFill>
+                            <a:srgbClr val="FFFFFF"/>
+                          </a:solidFill>
+                          <a:latin typeface="Calibri"/>
+                        </a:rPr>
+                        <a:t>Entregable</a:t>
+                      </a:r>
+                    </a:p>
+                  </a:txBody>
+                  <a:tcPr anchor="ctr" marL="109728" marR="91440" marT="36576" marB="36576">
+                    <a:solidFill>
+                      <a:srgbClr val="0C2340"/>
+                    </a:solidFill>
+                  </a:tcPr>
+                </a:tc>
+                <a:tc>
+                  <a:txBody>
+                    <a:bodyPr/>
+                    <a:lstStyle/>
+                    <a:p>
+                      <a:pPr algn="l"/>
+                      <a:r>
+                        <a:rPr sz="1300" b="1" i="0">
+                          <a:solidFill>
+                            <a:srgbClr val="FFFFFF"/>
+                          </a:solidFill>
+                          <a:latin typeface="Calibri"/>
+                        </a:rPr>
+                        <a:t>Qué debes tener listo</a:t>
+                      </a:r>
+                    </a:p>
+                  </a:txBody>
+                  <a:tcPr anchor="ctr" marL="109728" marR="91440" marT="36576" marB="36576">
+                    <a:solidFill>
+                      <a:srgbClr val="0C2340"/>
+                    </a:solidFill>
+                  </a:tcPr>
+                </a:tc>
+              </a:tr>
+              <a:tr h="477520">
+                <a:tc>
+                  <a:txBody>
+                    <a:bodyPr/>
+                    <a:lstStyle/>
+                    <a:p>
+                      <a:pPr algn="l"/>
+                      <a:r>
+                        <a:rPr sz="1100" b="1" i="0">
+                          <a:solidFill>
+                            <a:srgbClr val="2B2B2B"/>
+                          </a:solidFill>
+                          <a:latin typeface="Calibri"/>
+                        </a:rPr>
+                        <a:t>Sesión 03</a:t>
+                      </a:r>
+                      <a:r>
+                        <a:rPr sz="1100" b="0" i="0">
+                          <a:solidFill>
+                            <a:srgbClr val="2B2B2B"/>
+                          </a:solidFill>
+                          <a:latin typeface="Calibri"/>
+                        </a:rPr>
+                        <a:t> · ya cerró</a:t>
+                      </a:r>
+                    </a:p>
+                  </a:txBody>
+                  <a:tcPr anchor="ctr" marL="109728" marR="91440" marT="36576" marB="36576">
+                    <a:solidFill>
+                      <a:srgbClr val="FFFFFF"/>
+                    </a:solidFill>
+                  </a:tcPr>
+                </a:tc>
+                <a:tc>
+                  <a:txBody>
+                    <a:bodyPr/>
+                    <a:lstStyle/>
+                    <a:p>
+                      <a:pPr algn="l"/>
+                      <a:r>
+                        <a:rPr sz="1100" b="1" i="0">
+                          <a:solidFill>
+                            <a:srgbClr val="2B2B2B"/>
+                          </a:solidFill>
+                          <a:latin typeface="Calibri"/>
+                        </a:rPr>
+                        <a:t>Quiz 1</a:t>
+                      </a:r>
+                      <a:r>
+                        <a:rPr sz="1100" b="0" i="0">
+                          <a:solidFill>
+                            <a:srgbClr val="2B2B2B"/>
+                          </a:solidFill>
+                          <a:latin typeface="Calibri"/>
+                        </a:rPr>
+                        <a:t> · Cuestionario · 6%</a:t>
+                      </a:r>
+                    </a:p>
+                  </a:txBody>
+                  <a:tcPr anchor="ctr" marL="109728" marR="91440" marT="36576" marB="36576">
+                    <a:solidFill>
+                      <a:srgbClr val="FFFFFF"/>
+                    </a:solidFill>
+                  </a:tcPr>
+                </a:tc>
+                <a:tc>
+                  <a:txBody>
+                    <a:bodyPr/>
+                    <a:lstStyle/>
+                    <a:p>
+                      <a:pPr algn="l"/>
+                      <a:r>
+                        <a:rPr sz="1100" b="0" i="0">
+                          <a:solidFill>
+                            <a:srgbClr val="2B2B2B"/>
+                          </a:solidFill>
+                          <a:latin typeface="Calibri"/>
+                        </a:rPr>
+                        <a:t>Repasa </a:t>
+                      </a:r>
+                      <a:r>
+                        <a:rPr sz="1100" b="1" i="0">
+                          <a:solidFill>
+                            <a:srgbClr val="2B2B2B"/>
+                          </a:solidFill>
+                          <a:latin typeface="Calibri"/>
+                        </a:rPr>
+                        <a:t>pregunta, objetivos y título</a:t>
+                      </a:r>
+                      <a:r>
+                        <a:rPr sz="1100" b="0" i="0">
+                          <a:solidFill>
+                            <a:srgbClr val="2B2B2B"/>
+                          </a:solidFill>
+                          <a:latin typeface="Calibri"/>
+                        </a:rPr>
+                        <a:t> y las variables de la pregunta-problema.</a:t>
+                      </a:r>
+                    </a:p>
+                  </a:txBody>
+                  <a:tcPr anchor="ctr" marL="109728" marR="91440" marT="36576" marB="36576">
+                    <a:solidFill>
+                      <a:srgbClr val="FFFFFF"/>
+                    </a:solidFill>
+                  </a:tcPr>
+                </a:tc>
+              </a:tr>
+              <a:tr h="477520">
+                <a:tc>
+                  <a:txBody>
+                    <a:bodyPr/>
+                    <a:lstStyle/>
+                    <a:p>
+                      <a:pPr algn="l"/>
+                      <a:r>
+                        <a:rPr sz="1100" b="1" i="0">
+                          <a:solidFill>
+                            <a:srgbClr val="2B2B2B"/>
+                          </a:solidFill>
+                          <a:latin typeface="Calibri"/>
+                        </a:rPr>
+                        <a:t>Sesión 06</a:t>
+                      </a:r>
+                      <a:r>
+                        <a:rPr sz="1100" b="0" i="0">
+                          <a:solidFill>
+                            <a:srgbClr val="2B2B2B"/>
+                          </a:solidFill>
+                          <a:latin typeface="Calibri"/>
+                        </a:rPr>
+                        <a:t> · ya cerró</a:t>
+                      </a:r>
+                    </a:p>
+                  </a:txBody>
+                  <a:tcPr anchor="ctr" marL="109728" marR="91440" marT="36576" marB="36576">
+                    <a:solidFill>
+                      <a:srgbClr val="F2F2F2"/>
+                    </a:solidFill>
+                  </a:tcPr>
+                </a:tc>
+                <a:tc>
+                  <a:txBody>
+                    <a:bodyPr/>
+                    <a:lstStyle/>
+                    <a:p>
+                      <a:pPr algn="l"/>
+                      <a:r>
+                        <a:rPr sz="1100" b="1" i="0">
+                          <a:solidFill>
+                            <a:srgbClr val="2B2B2B"/>
+                          </a:solidFill>
+                          <a:latin typeface="Calibri"/>
+                        </a:rPr>
+                        <a:t>Parcial 1</a:t>
+                      </a:r>
+                      <a:r>
+                        <a:rPr sz="1100" b="0" i="0">
+                          <a:solidFill>
+                            <a:srgbClr val="2B2B2B"/>
+                          </a:solidFill>
+                          <a:latin typeface="Calibri"/>
+                        </a:rPr>
+                        <a:t> · Cuestionario · 24%</a:t>
+                      </a:r>
+                    </a:p>
+                  </a:txBody>
+                  <a:tcPr anchor="ctr" marL="109728" marR="91440" marT="36576" marB="36576">
+                    <a:solidFill>
+                      <a:srgbClr val="F2F2F2"/>
+                    </a:solidFill>
+                  </a:tcPr>
+                </a:tc>
+                <a:tc>
+                  <a:txBody>
+                    <a:bodyPr/>
+                    <a:lstStyle/>
+                    <a:p>
+                      <a:pPr algn="l"/>
+                      <a:r>
+                        <a:rPr sz="1100" b="0" i="0">
+                          <a:solidFill>
+                            <a:srgbClr val="2B2B2B"/>
+                          </a:solidFill>
+                          <a:latin typeface="Calibri"/>
+                        </a:rPr>
+                        <a:t>Estudia la </a:t>
+                      </a:r>
+                      <a:r>
+                        <a:rPr sz="1100" b="1" i="0">
+                          <a:solidFill>
+                            <a:srgbClr val="2B2B2B"/>
+                          </a:solidFill>
+                          <a:latin typeface="Calibri"/>
+                        </a:rPr>
+                        <a:t>introducción</a:t>
+                      </a:r>
+                      <a:r>
+                        <a:rPr sz="1100" b="0" i="0">
+                          <a:solidFill>
+                            <a:srgbClr val="2B2B2B"/>
+                          </a:solidFill>
+                          <a:latin typeface="Calibri"/>
+                        </a:rPr>
+                        <a:t>, los referentes Fase I y el instrumento ya diseñado.</a:t>
+                      </a:r>
+                    </a:p>
+                  </a:txBody>
+                  <a:tcPr anchor="ctr" marL="109728" marR="91440" marT="36576" marB="36576">
+                    <a:solidFill>
+                      <a:srgbClr val="F2F2F2"/>
+                    </a:solidFill>
+                  </a:tcPr>
+                </a:tc>
+              </a:tr>
+              <a:tr h="477520">
+                <a:tc>
+                  <a:txBody>
+                    <a:bodyPr/>
+                    <a:lstStyle/>
+                    <a:p>
+                      <a:pPr algn="l"/>
+                      <a:r>
+                        <a:rPr sz="1100" b="1" i="0">
+                          <a:solidFill>
+                            <a:srgbClr val="2B2B2B"/>
+                          </a:solidFill>
+                          <a:latin typeface="Calibri"/>
+                        </a:rPr>
+                        <a:t>Sesión 08</a:t>
+                      </a:r>
+                      <a:r>
+                        <a:rPr sz="1100" b="0" i="0">
+                          <a:solidFill>
+                            <a:srgbClr val="2B2B2B"/>
+                          </a:solidFill>
+                          <a:latin typeface="Calibri"/>
+                        </a:rPr>
+                        <a:t> · ya cerró</a:t>
+                      </a:r>
+                    </a:p>
+                  </a:txBody>
+                  <a:tcPr anchor="ctr" marL="109728" marR="91440" marT="36576" marB="36576">
+                    <a:solidFill>
+                      <a:srgbClr val="FFFFFF"/>
+                    </a:solidFill>
+                  </a:tcPr>
+                </a:tc>
+                <a:tc>
+                  <a:txBody>
+                    <a:bodyPr/>
+                    <a:lstStyle/>
+                    <a:p>
+                      <a:pPr algn="l"/>
+                      <a:r>
+                        <a:rPr sz="1100" b="1" i="0">
+                          <a:solidFill>
+                            <a:srgbClr val="2B2B2B"/>
+                          </a:solidFill>
+                          <a:latin typeface="Calibri"/>
+                        </a:rPr>
+                        <a:t>Quiz 2</a:t>
+                      </a:r>
+                      <a:r>
+                        <a:rPr sz="1100" b="0" i="0">
+                          <a:solidFill>
+                            <a:srgbClr val="2B2B2B"/>
+                          </a:solidFill>
+                          <a:latin typeface="Calibri"/>
+                        </a:rPr>
+                        <a:t> · Cuestionario · 9%</a:t>
+                      </a:r>
+                    </a:p>
+                  </a:txBody>
+                  <a:tcPr anchor="ctr" marL="109728" marR="91440" marT="36576" marB="36576">
+                    <a:solidFill>
+                      <a:srgbClr val="FFFFFF"/>
+                    </a:solidFill>
+                  </a:tcPr>
+                </a:tc>
+                <a:tc>
+                  <a:txBody>
+                    <a:bodyPr/>
+                    <a:lstStyle/>
+                    <a:p>
+                      <a:pPr algn="l"/>
+                      <a:r>
+                        <a:rPr sz="1100" b="0" i="0">
+                          <a:solidFill>
+                            <a:srgbClr val="2B2B2B"/>
+                          </a:solidFill>
+                          <a:latin typeface="Calibri"/>
+                        </a:rPr>
+                        <a:t>Estudia </a:t>
+                      </a:r>
+                      <a:r>
+                        <a:rPr sz="1100" b="1" i="0">
+                          <a:solidFill>
+                            <a:srgbClr val="2B2B2B"/>
+                          </a:solidFill>
+                          <a:latin typeface="Calibri"/>
+                        </a:rPr>
+                        <a:t>comunidades de práctica</a:t>
+                      </a:r>
+                      <a:r>
+                        <a:rPr sz="1100" b="0" i="0">
+                          <a:solidFill>
+                            <a:srgbClr val="2B2B2B"/>
+                          </a:solidFill>
+                          <a:latin typeface="Calibri"/>
+                        </a:rPr>
+                        <a:t>, co-creación y análisis de datos.</a:t>
+                      </a:r>
+                    </a:p>
+                  </a:txBody>
+                  <a:tcPr anchor="ctr" marL="109728" marR="91440" marT="36576" marB="36576">
+                    <a:solidFill>
+                      <a:srgbClr val="FFFFFF"/>
+                    </a:solidFill>
+                  </a:tcPr>
+                </a:tc>
+              </a:tr>
+              <a:tr h="477520">
+                <a:tc>
+                  <a:txBody>
+                    <a:bodyPr/>
+                    <a:lstStyle/>
+                    <a:p>
+                      <a:pPr algn="l"/>
+                      <a:r>
+                        <a:rPr sz="1100" b="1" i="0">
+                          <a:solidFill>
+                            <a:srgbClr val="2B2B2B"/>
+                          </a:solidFill>
+                          <a:latin typeface="Calibri"/>
+                        </a:rPr>
+                        <a:t>Sesión 10</a:t>
+                      </a:r>
+                      <a:r>
+                        <a:rPr sz="1100" b="0" i="0">
+                          <a:solidFill>
+                            <a:srgbClr val="2B2B2B"/>
+                          </a:solidFill>
+                          <a:latin typeface="Calibri"/>
+                        </a:rPr>
+                        <a:t> · ya cerró</a:t>
+                      </a:r>
+                    </a:p>
+                  </a:txBody>
+                  <a:tcPr anchor="ctr" marL="109728" marR="91440" marT="36576" marB="36576">
+                    <a:solidFill>
+                      <a:srgbClr val="F2F2F2"/>
+                    </a:solidFill>
+                  </a:tcPr>
+                </a:tc>
+                <a:tc>
+                  <a:txBody>
+                    <a:bodyPr/>
+                    <a:lstStyle/>
+                    <a:p>
+                      <a:pPr algn="l"/>
+                      <a:r>
+                        <a:rPr sz="1100" b="1" i="0">
+                          <a:solidFill>
+                            <a:srgbClr val="2B2B2B"/>
+                          </a:solidFill>
+                          <a:latin typeface="Calibri"/>
+                        </a:rPr>
+                        <a:t>Parcial 2</a:t>
+                      </a:r>
+                      <a:r>
+                        <a:rPr sz="1100" b="0" i="0">
+                          <a:solidFill>
+                            <a:srgbClr val="2B2B2B"/>
+                          </a:solidFill>
+                          <a:latin typeface="Calibri"/>
+                        </a:rPr>
+                        <a:t> · Cuestionario · 21%</a:t>
+                      </a:r>
+                    </a:p>
+                  </a:txBody>
+                  <a:tcPr anchor="ctr" marL="109728" marR="91440" marT="36576" marB="36576">
+                    <a:solidFill>
+                      <a:srgbClr val="F2F2F2"/>
+                    </a:solidFill>
+                  </a:tcPr>
+                </a:tc>
+                <a:tc>
+                  <a:txBody>
+                    <a:bodyPr/>
+                    <a:lstStyle/>
+                    <a:p>
+                      <a:pPr algn="l"/>
+                      <a:r>
+                        <a:rPr sz="1100" b="0" i="0">
+                          <a:solidFill>
+                            <a:srgbClr val="2B2B2B"/>
+                          </a:solidFill>
+                          <a:latin typeface="Calibri"/>
+                        </a:rPr>
+                        <a:t>Estudia el cierre del </a:t>
+                      </a:r>
+                      <a:r>
+                        <a:rPr sz="1100" b="1" i="0">
+                          <a:solidFill>
+                            <a:srgbClr val="2B2B2B"/>
+                          </a:solidFill>
+                          <a:latin typeface="Calibri"/>
+                        </a:rPr>
+                        <a:t>marco teórico</a:t>
+                      </a:r>
+                      <a:r>
+                        <a:rPr sz="1100" b="0" i="0">
+                          <a:solidFill>
+                            <a:srgbClr val="2B2B2B"/>
+                          </a:solidFill>
+                          <a:latin typeface="Calibri"/>
+                        </a:rPr>
+                        <a:t>, los resultados y la discusión.</a:t>
+                      </a:r>
+                    </a:p>
+                  </a:txBody>
+                  <a:tcPr anchor="ctr" marL="109728" marR="91440" marT="36576" marB="36576">
+                    <a:solidFill>
+                      <a:srgbClr val="F2F2F2"/>
+                    </a:solidFill>
+                  </a:tcPr>
+                </a:tc>
+              </a:tr>
+              <a:tr h="477520">
+                <a:tc>
+                  <a:txBody>
+                    <a:bodyPr/>
+                    <a:lstStyle/>
+                    <a:p>
+                      <a:pPr algn="l"/>
+                      <a:r>
+                        <a:rPr sz="1100" b="1" i="0">
+                          <a:solidFill>
+                            <a:srgbClr val="2B2B2B"/>
+                          </a:solidFill>
+                          <a:latin typeface="Calibri"/>
+                        </a:rPr>
+                        <a:t>Sesión 12</a:t>
+                      </a:r>
+                      <a:r>
+                        <a:rPr sz="1100" b="0" i="0">
+                          <a:solidFill>
+                            <a:srgbClr val="2B2B2B"/>
+                          </a:solidFill>
+                          <a:latin typeface="Calibri"/>
+                        </a:rPr>
+                        <a:t> · ya cerró</a:t>
+                      </a:r>
+                    </a:p>
+                  </a:txBody>
+                  <a:tcPr anchor="ctr" marL="109728" marR="91440" marT="36576" marB="36576">
+                    <a:solidFill>
+                      <a:srgbClr val="FFFFFF"/>
+                    </a:solidFill>
+                  </a:tcPr>
+                </a:tc>
+                <a:tc>
+                  <a:txBody>
+                    <a:bodyPr/>
+                    <a:lstStyle/>
+                    <a:p>
+                      <a:pPr algn="l"/>
+                      <a:r>
+                        <a:rPr sz="1100" b="1" i="0">
+                          <a:solidFill>
+                            <a:srgbClr val="2B2B2B"/>
+                          </a:solidFill>
+                          <a:latin typeface="Calibri"/>
+                        </a:rPr>
+                        <a:t>Quiz 3</a:t>
+                      </a:r>
+                      <a:r>
+                        <a:rPr sz="1100" b="0" i="0">
+                          <a:solidFill>
+                            <a:srgbClr val="2B2B2B"/>
+                          </a:solidFill>
+                          <a:latin typeface="Calibri"/>
+                        </a:rPr>
+                        <a:t> · Cuestionario · 4%</a:t>
+                      </a:r>
+                    </a:p>
+                  </a:txBody>
+                  <a:tcPr anchor="ctr" marL="109728" marR="91440" marT="36576" marB="36576">
+                    <a:solidFill>
+                      <a:srgbClr val="FFFFFF"/>
+                    </a:solidFill>
+                  </a:tcPr>
+                </a:tc>
+                <a:tc>
+                  <a:txBody>
+                    <a:bodyPr/>
+                    <a:lstStyle/>
+                    <a:p>
+                      <a:pPr algn="l"/>
+                      <a:r>
+                        <a:rPr sz="1100" b="0" i="0">
+                          <a:solidFill>
+                            <a:srgbClr val="2B2B2B"/>
+                          </a:solidFill>
+                          <a:latin typeface="Calibri"/>
+                        </a:rPr>
+                        <a:t>Ten claros </a:t>
+                      </a:r>
+                      <a:r>
+                        <a:rPr sz="1100" b="1" i="0">
+                          <a:solidFill>
+                            <a:srgbClr val="2B2B2B"/>
+                          </a:solidFill>
+                          <a:latin typeface="Calibri"/>
+                        </a:rPr>
+                        <a:t>resumen</a:t>
+                      </a:r>
+                      <a:r>
+                        <a:rPr sz="1100" b="0" i="0">
+                          <a:solidFill>
+                            <a:srgbClr val="2B2B2B"/>
+                          </a:solidFill>
+                          <a:latin typeface="Calibri"/>
+                        </a:rPr>
+                        <a:t>, palabras clave UNESCO, póster y verificación antiplagio.</a:t>
+                      </a:r>
+                    </a:p>
+                  </a:txBody>
+                  <a:tcPr anchor="ctr" marL="109728" marR="91440" marT="36576" marB="36576">
+                    <a:solidFill>
+                      <a:srgbClr val="FFFFFF"/>
+                    </a:solidFill>
+                  </a:tcPr>
+                </a:tc>
+              </a:tr>
+              <a:tr h="477520">
+                <a:tc>
+                  <a:txBody>
+                    <a:bodyPr/>
+                    <a:lstStyle/>
+                    <a:p>
+                      <a:pPr algn="l"/>
+                      <a:r>
+                        <a:rPr sz="1100" b="1" i="0">
+                          <a:solidFill>
+                            <a:srgbClr val="2B2B2B"/>
+                          </a:solidFill>
+                          <a:latin typeface="Calibri"/>
+                        </a:rPr>
+                        <a:t>Sesión 13</a:t>
+                      </a:r>
+                      <a:r>
+                        <a:rPr sz="1100" b="0" i="0">
+                          <a:solidFill>
+                            <a:srgbClr val="2B2B2B"/>
+                          </a:solidFill>
+                          <a:latin typeface="Calibri"/>
+                        </a:rPr>
+                        <a:t> · cierra esta semana</a:t>
+                      </a:r>
+                    </a:p>
+                  </a:txBody>
+                  <a:tcPr anchor="ctr" marL="109728" marR="91440" marT="36576" marB="36576">
+                    <a:solidFill>
+                      <a:srgbClr val="F2F2F2"/>
+                    </a:solidFill>
+                  </a:tcPr>
+                </a:tc>
+                <a:tc>
+                  <a:txBody>
+                    <a:bodyPr/>
+                    <a:lstStyle/>
+                    <a:p>
+                      <a:pPr algn="l"/>
+                      <a:r>
+                        <a:rPr sz="1100" b="1" i="0">
+                          <a:solidFill>
+                            <a:srgbClr val="2B2B2B"/>
+                          </a:solidFill>
+                          <a:latin typeface="Calibri"/>
+                        </a:rPr>
+                        <a:t>ACA Final</a:t>
+                      </a:r>
+                      <a:r>
+                        <a:rPr sz="1100" b="0" i="0">
+                          <a:solidFill>
+                            <a:srgbClr val="2B2B2B"/>
+                          </a:solidFill>
+                          <a:latin typeface="Calibri"/>
+                        </a:rPr>
+                        <a:t> · Tarea · 32%</a:t>
+                      </a:r>
+                    </a:p>
+                  </a:txBody>
+                  <a:tcPr anchor="ctr" marL="109728" marR="91440" marT="36576" marB="36576">
+                    <a:solidFill>
+                      <a:srgbClr val="F2F2F2"/>
+                    </a:solidFill>
+                  </a:tcPr>
+                </a:tc>
+                <a:tc>
+                  <a:txBody>
+                    <a:bodyPr/>
+                    <a:lstStyle/>
+                    <a:p>
+                      <a:pPr algn="l"/>
+                      <a:r>
+                        <a:rPr sz="1100" b="0" i="0">
+                          <a:solidFill>
+                            <a:srgbClr val="2B2B2B"/>
+                          </a:solidFill>
+                          <a:latin typeface="Calibri"/>
+                        </a:rPr>
+                        <a:t>Sube el </a:t>
+                      </a:r>
+                      <a:r>
+                        <a:rPr sz="1100" b="1" i="0">
+                          <a:solidFill>
+                            <a:srgbClr val="2B2B2B"/>
+                          </a:solidFill>
+                          <a:latin typeface="Calibri"/>
+                        </a:rPr>
+                        <a:t>documento final</a:t>
+                      </a:r>
+                      <a:r>
+                        <a:rPr sz="1100" b="0" i="0">
+                          <a:solidFill>
+                            <a:srgbClr val="2B2B2B"/>
+                          </a:solidFill>
+                          <a:latin typeface="Calibri"/>
+                        </a:rPr>
+                        <a:t> en plantilla APA CUN: mínimo 4.000 palabras y 50 referencias.</a:t>
+                      </a:r>
+                    </a:p>
+                  </a:txBody>
+                  <a:tcPr anchor="ctr" marL="109728" marR="91440" marT="36576" marB="36576">
+                    <a:solidFill>
+                      <a:srgbClr val="F2F2F2"/>
+                    </a:solidFill>
+                  </a:tcPr>
+                </a:tc>
+              </a:tr>
+              <a:tr h="477520">
+                <a:tc>
+                  <a:txBody>
+                    <a:bodyPr/>
+                    <a:lstStyle/>
+                    <a:p>
+                      <a:pPr algn="l"/>
+                      <a:r>
+                        <a:rPr sz="1100" b="1" i="0">
+                          <a:solidFill>
+                            <a:srgbClr val="2B2B2B"/>
+                          </a:solidFill>
+                          <a:latin typeface="Calibri"/>
+                        </a:rPr>
+                        <a:t>Sesión 14</a:t>
+                      </a:r>
+                      <a:r>
+                        <a:rPr sz="1100" b="0" i="0">
+                          <a:solidFill>
+                            <a:srgbClr val="2B2B2B"/>
+                          </a:solidFill>
+                          <a:latin typeface="Calibri"/>
+                        </a:rPr>
+                        <a:t> · pendiente</a:t>
+                      </a:r>
+                    </a:p>
+                  </a:txBody>
+                  <a:tcPr anchor="ctr" marL="109728" marR="91440" marT="36576" marB="36576">
+                    <a:solidFill>
+                      <a:srgbClr val="FFFFFF"/>
+                    </a:solidFill>
+                  </a:tcPr>
+                </a:tc>
+                <a:tc>
+                  <a:txBody>
+                    <a:bodyPr/>
+                    <a:lstStyle/>
+                    <a:p>
+                      <a:pPr algn="l"/>
+                      <a:r>
+                        <a:rPr sz="1100" b="1" i="0">
+                          <a:solidFill>
+                            <a:srgbClr val="2B2B2B"/>
+                          </a:solidFill>
+                          <a:latin typeface="Calibri"/>
+                        </a:rPr>
+                        <a:t>Autoevaluación</a:t>
+                      </a:r>
+                      <a:r>
+                        <a:rPr sz="1100" b="0" i="0">
+                          <a:solidFill>
+                            <a:srgbClr val="2B2B2B"/>
+                          </a:solidFill>
+                          <a:latin typeface="Calibri"/>
+                        </a:rPr>
+                        <a:t> · Cuestionario · 2%</a:t>
+                      </a:r>
+                    </a:p>
+                  </a:txBody>
+                  <a:tcPr anchor="ctr" marL="109728" marR="91440" marT="36576" marB="36576">
+                    <a:solidFill>
+                      <a:srgbClr val="FFFFFF"/>
+                    </a:solidFill>
+                  </a:tcPr>
+                </a:tc>
+                <a:tc>
+                  <a:txBody>
+                    <a:bodyPr/>
+                    <a:lstStyle/>
+                    <a:p>
+                      <a:pPr algn="l"/>
+                      <a:r>
+                        <a:rPr sz="1100" b="0" i="0">
+                          <a:solidFill>
+                            <a:srgbClr val="2B2B2B"/>
+                          </a:solidFill>
+                          <a:latin typeface="Calibri"/>
+                        </a:rPr>
+                        <a:t>Diligénciala </a:t>
+                      </a:r>
+                      <a:r>
+                        <a:rPr sz="1100" b="1" i="0">
+                          <a:solidFill>
+                            <a:srgbClr val="2B2B2B"/>
+                          </a:solidFill>
+                          <a:latin typeface="Calibri"/>
+                        </a:rPr>
+                        <a:t>tú</a:t>
+                      </a:r>
+                      <a:r>
+                        <a:rPr sz="1100" b="0" i="0">
+                          <a:solidFill>
+                            <a:srgbClr val="2B2B2B"/>
+                          </a:solidFill>
+                          <a:latin typeface="Calibri"/>
+                        </a:rPr>
+                        <a:t>, dentro de su ventana, sobre tu participación real.</a:t>
+                      </a:r>
+                    </a:p>
+                  </a:txBody>
+                  <a:tcPr anchor="ctr" marL="109728" marR="91440" marT="36576" marB="36576">
+                    <a:solidFill>
+                      <a:srgbClr val="FFFFFF"/>
+                    </a:solidFill>
+                  </a:tcPr>
+                </a:tc>
+              </a:tr>
+              <a:tr h="477520">
+                <a:tc>
+                  <a:txBody>
+                    <a:bodyPr/>
+                    <a:lstStyle/>
+                    <a:p>
+                      <a:pPr algn="l"/>
+                      <a:r>
+                        <a:rPr sz="1100" b="1" i="0">
+                          <a:solidFill>
+                            <a:srgbClr val="2B2B2B"/>
+                          </a:solidFill>
+                          <a:latin typeface="Calibri"/>
+                        </a:rPr>
+                        <a:t>Sesión 14</a:t>
+                      </a:r>
+                      <a:r>
+                        <a:rPr sz="1100" b="0" i="0">
+                          <a:solidFill>
+                            <a:srgbClr val="2B2B2B"/>
+                          </a:solidFill>
+                          <a:latin typeface="Calibri"/>
+                        </a:rPr>
+                        <a:t> · pendiente</a:t>
+                      </a:r>
+                    </a:p>
+                  </a:txBody>
+                  <a:tcPr anchor="ctr" marL="109728" marR="91440" marT="36576" marB="36576">
+                    <a:solidFill>
+                      <a:srgbClr val="F2F2F2"/>
+                    </a:solidFill>
+                  </a:tcPr>
+                </a:tc>
+                <a:tc>
+                  <a:txBody>
+                    <a:bodyPr/>
+                    <a:lstStyle/>
+                    <a:p>
+                      <a:pPr algn="l"/>
+                      <a:r>
+                        <a:rPr sz="1100" b="1" i="0">
+                          <a:solidFill>
+                            <a:srgbClr val="2B2B2B"/>
+                          </a:solidFill>
+                          <a:latin typeface="Calibri"/>
+                        </a:rPr>
+                        <a:t>Coevaluación</a:t>
+                      </a:r>
+                      <a:r>
+                        <a:rPr sz="1100" b="0" i="0">
+                          <a:solidFill>
+                            <a:srgbClr val="2B2B2B"/>
+                          </a:solidFill>
+                          <a:latin typeface="Calibri"/>
+                        </a:rPr>
+                        <a:t> · Foro · 2%</a:t>
+                      </a:r>
+                    </a:p>
+                  </a:txBody>
+                  <a:tcPr anchor="ctr" marL="109728" marR="91440" marT="36576" marB="36576">
+                    <a:solidFill>
+                      <a:srgbClr val="F2F2F2"/>
+                    </a:solidFill>
+                  </a:tcPr>
+                </a:tc>
+                <a:tc>
+                  <a:txBody>
+                    <a:bodyPr/>
+                    <a:lstStyle/>
+                    <a:p>
+                      <a:pPr algn="l"/>
+                      <a:r>
+                        <a:rPr sz="1100" b="1" i="0">
+                          <a:solidFill>
+                            <a:srgbClr val="2B2B2B"/>
+                          </a:solidFill>
+                          <a:latin typeface="Calibri"/>
+                        </a:rPr>
+                        <a:t>Publica</a:t>
+                      </a:r>
+                      <a:r>
+                        <a:rPr sz="1100" b="0" i="0">
+                          <a:solidFill>
+                            <a:srgbClr val="2B2B2B"/>
+                          </a:solidFill>
+                          <a:latin typeface="Calibri"/>
+                        </a:rPr>
+                        <a:t> tu aporte dentro de la ventana: un borrador sin enviar no cuenta.</a:t>
+                      </a:r>
+                    </a:p>
+                  </a:txBody>
+                  <a:tcPr anchor="ctr" marL="109728" marR="91440" marT="36576" marB="36576">
+                    <a:solidFill>
+                      <a:srgbClr val="F2F2F2"/>
+                    </a:solidFill>
+                  </a:tcPr>
+                </a:tc>
+              </a:tr>
+            </a:tbl>
+          </a:graphicData>
+        </a:graphic>
+      </p:graphicFrame>
+      <p:sp>
+        <p:nvSpPr>
+          <p:cNvPr id="6" name="TextBox 5"/>
+          <p:cNvSpPr txBox="1"/>
+          <p:nvPr/>
+        </p:nvSpPr>
+        <p:spPr>
+          <a:xfrm>
+            <a:off x="640080" y="6080760"/>
+            <a:ext cx="10911535" cy="548640"/>
+          </a:xfrm>
+          <a:prstGeom prst="rect">
+            <a:avLst/>
+          </a:prstGeom>
+          <a:noFill/>
+        </p:spPr>
+        <p:txBody>
+          <a:bodyPr wrap="square" anchor="t" lIns="0" rIns="0" tIns="0" bIns="0">
+            <a:spAutoFit/>
+          </a:bodyPr>
+          <a:lstStyle/>
+          <a:p>
+            <a:r>
+              <a:rPr sz="1200" b="0" i="1">
+                <a:solidFill>
+                  <a:srgbClr val="2B2B2B"/>
+                </a:solidFill>
+                <a:latin typeface="Calibri"/>
+              </a:rPr>
+              <a:t>Esta misma tabla va al final de todas las sesiones. La </a:t>
+            </a:r>
+            <a:r>
+              <a:rPr sz="1200" b="1" i="1">
+                <a:solidFill>
+                  <a:srgbClr val="2B2B2B"/>
+                </a:solidFill>
+                <a:latin typeface="Calibri"/>
+              </a:rPr>
+              <a:t>fecha</a:t>
+            </a:r>
+            <a:r>
+              <a:rPr sz="1200" b="0" i="1">
+                <a:solidFill>
+                  <a:srgbClr val="2B2B2B"/>
+                </a:solidFill>
+                <a:latin typeface="Calibri"/>
+              </a:rPr>
+              <a:t> de cada ventana está en el enunciado del ítem (`Clases/Recursos/ACAs/`) y en el aula: si el aula y cualquier otro material se contradicen, </a:t>
+            </a:r>
+            <a:r>
+              <a:rPr sz="1200" b="1" i="1">
+                <a:solidFill>
+                  <a:srgbClr val="2B2B2B"/>
+                </a:solidFill>
+                <a:latin typeface="Calibri"/>
+              </a:rPr>
+              <a:t>manda el aula</a:t>
+            </a:r>
+            <a:r>
+              <a:rPr sz="1200" b="0" i="1">
+                <a:solidFill>
+                  <a:srgbClr val="2B2B2B"/>
+                </a:solidFill>
+                <a:latin typeface="Calibri"/>
+              </a:rPr>
+              <a:t>.</a:t>
+            </a:r>
+          </a:p>
+        </p:txBody>
+      </p:sp>
+      <p:sp>
+        <p:nvSpPr>
+          <p:cNvPr id="7" name="TextBox 6"/>
+          <p:cNvSpPr txBox="1"/>
+          <p:nvPr/>
+        </p:nvSpPr>
+        <p:spPr>
+          <a:xfrm>
+            <a:off x="11094415" y="6446520"/>
+            <a:ext cx="548640" cy="274320"/>
+          </a:xfrm>
+          <a:prstGeom prst="rect">
+            <a:avLst/>
+          </a:prstGeom>
+          <a:noFill/>
+        </p:spPr>
+        <p:txBody>
+          <a:bodyPr wrap="square" anchor="t" lIns="0" rIns="0" tIns="0" bIns="0">
+            <a:spAutoFit/>
+          </a:bodyPr>
+          <a:lstStyle/>
+          <a:p>
+            <a:pPr algn="r"/>
+            <a:r>
+              <a:rPr sz="1000" b="1" i="0">
+                <a:solidFill>
+                  <a:srgbClr val="8F989D"/>
+                </a:solidFill>
+                <a:latin typeface="Calibri"/>
+              </a:rPr>
+              <a:t>21</a:t>
+            </a:r>
+          </a:p>
+        </p:txBody>
+      </p:sp>
+    </p:spTree>
+  </p:cSld>
+  <p:clrMapOvr>
+    <a:masterClrMapping/>
+  </p:clrMapOvr>
+</p:sld>
+</file>
+
+<file path=ppt/slides/slide22.xml><?xml version="1.0" encoding="utf-8"?>
 <p:sld xmlns:a="http://schemas.openxmlformats.org/drawingml/2006/main" xmlns:p="http://schemas.openxmlformats.org/presentationml/2006/main" xmlns:r="http://schemas.openxmlformats.org/officeDocument/2006/relationships">
   <p:cSld>
     <p:bg>
@@ -9723,7 +11223,7 @@
                 </a:solidFill>
                 <a:latin typeface="Calibri"/>
               </a:rPr>
-              <a:t>–   Cierre del hilo del semestre: el artículo que empezó como una pregunta en la Sesión 02 termina </a:t>
+              <a:t>–   Cierre del hilo del semestre: el documento que empezó como una pregunta en la Sesión 02 termina </a:t>
             </a:r>
             <a:r>
               <a:rPr sz="1600" b="1" i="0">
@@ -9994,7 +11494,7 @@
                           </a:solidFill>
                           <a:latin typeface="Calibri"/>
                         </a:rPr>
-                        <a:t>Artículo final (PDF)</a:t>
+                        <a:t>Documento final (PDF)</a:t>
                       </a:r>
                     </a:p>
                   </a:txBody>
@@ -10672,7 +12172,7 @@
                 </a:solidFill>
                 <a:latin typeface="Calibri"/>
               </a:rPr>
-              <a:t> Es lo que el buscador lee para saber de qué se trata su artículo.</a:t>
+              <a:t> Es lo que el buscador lee para saber de qué se trata su documento.</a:t>
             </a:r>
           </a:p>
           <a:p>
@@ -10688,7 +12188,7 @@
                 </a:solidFill>
                 <a:latin typeface="Calibri"/>
               </a:rPr>
-              <a:t>–   Analogía: el artículo es el libro; los metadatos son la </a:t>
+              <a:t>–   Analogía: el documento es el libro; los metadatos son la </a:t>
             </a:r>
             <a:r>
               <a:rPr sz="1600" b="1" i="0">
@@ -10790,7 +12290,7 @@
                 </a:solidFill>
                 <a:latin typeface="Calibri"/>
               </a:rPr>
-              <a:t> — nombres completos, en el mismo orden del artículo, sin apodos ni iniciales sueltas.</a:t>
+              <a:t> — nombres completos, en el mismo orden del documento, sin apodos ni iniciales sueltas.</a:t>
             </a:r>
           </a:p>
           <a:p>
@@ -10901,7 +12401,7 @@
                 </a:solidFill>
                 <a:latin typeface="Calibri"/>
               </a:rPr>
-              <a:t>Deben coincidir con el artículo.</a:t>
+              <a:t>Deben coincidir con el documento.</a:t>
             </a:r>
           </a:p>
           <a:p>
@@ -11150,7 +12650,7 @@
                 </a:solidFill>
                 <a:latin typeface="Calibri"/>
               </a:rPr>
-              <a:t> del artículo ya aprobado.</a:t>
+              <a:t> del documento ya aprobado.</a:t>
             </a:r>
           </a:p>
         </p:txBody>
@@ -11363,7 +12863,7 @@
                 </a:solidFill>
                 <a:latin typeface="Calibri"/>
               </a:rPr>
-              <a:t>●   Copiado tal cual del artículo. Sin punto final, sin mayúsculas sostenidas, sin "Trabajo de grado presentado para…".</a:t>
+              <a:t>●   Copiado tal cual del documento. Sin punto final, sin mayúsculas sostenidas, sin "Trabajo de grado presentado para…".</a:t>
             </a:r>
           </a:p>
           <a:p>
@@ -11481,7 +12981,7 @@
                 </a:solidFill>
                 <a:latin typeface="Calibri"/>
               </a:rPr>
-              <a:t>●   Las mismas cuatro del artículo, en minúscula, separadas por punto y coma. </a:t>
+              <a:t>●   Las mismas cuatro del documento, en minúscula, separadas por punto y coma. </a:t>
             </a:r>
             <a:r>
               <a:rPr sz="1400" b="1" i="0">
@@ -11524,7 +13024,7 @@
                 </a:solidFill>
                 <a:latin typeface="Calibri"/>
               </a:rPr>
-              <a:t> artículo de trabajo de grado.</a:t>
+              <a:t> documento de trabajo de grado.</a:t>
             </a:r>
           </a:p>
           <a:p>
@@ -11891,7 +13391,7 @@
                           </a:solidFill>
                           <a:latin typeface="Calibri"/>
                         </a:rPr>
-                        <a:t>El título real y completo del artículo</a:t>
+                        <a:t>El título real y completo del documento</a:t>
                       </a:r>
                     </a:p>
                   </a:txBody>
@@ -12104,7 +13604,7 @@
                           </a:solidFill>
                           <a:latin typeface="Calibri"/>
                         </a:rPr>
-                        <a:t>Los 4 términos UNESCO usados en el artículo</a:t>
+                        <a:t>Los 4 términos UNESCO usados en el documento</a:t>
                       </a:r>
                     </a:p>
                   </a:txBody>
@@ -12290,7 +13790,7 @@
                 </a:solidFill>
                 <a:latin typeface="Calibri"/>
               </a:rPr>
-              <a:t>Consecuencia real de la columna del medio: un buen artículo que </a:t>
+              <a:t>Consecuencia real de la columna del medio: un buen documento que </a:t>
             </a:r>
             <a:r>
               <a:rPr sz="1200" b="1" i="1">
